--- a/V-Keyframe-presentation.pptx
+++ b/V-Keyframe-presentation.pptx
@@ -13,9 +13,10 @@
     <p:sldId id="261" r:id="rId7"/>
     <p:sldId id="262" r:id="rId8"/>
     <p:sldId id="263" r:id="rId9"/>
+    <p:sldId id="264" r:id="rId10"/>
   </p:sldIdLst>
   <p:notesMasterIdLst>
-    <p:notesMasterId r:id="rId10"/>
+    <p:notesMasterId r:id="rId11"/>
   </p:notesMasterIdLst>
   <p:sldSz cx="12192000" cy="6858000"/>
   <p:notesSz cx="6858000" cy="12192000"/>
@@ -1149,6 +1150,94 @@
             <a:fld id="{F7021451-1387-4CA6-816F-3879F97B5CBC}" type="slidenum">
               <a:rPr lang="en-US"/>
               <a:t>8</a:t>
+            </a:fld>
+            <a:endParaRPr lang="en-US"/>
+          </a:p>
+        </p:txBody>
+      </p:sp>
+    </p:spTree>
+    <p:extLst>
+      <p:ext uri="{BB962C8B-B14F-4D97-AF65-F5344CB8AC3E}">
+        <p14:creationId xmlns:p14="http://schemas.microsoft.com/office/powerpoint/2010/main" val="1024086991"/>
+      </p:ext>
+    </p:extLst>
+  </p:cSld>
+  <p:clrMapOvr>
+    <a:masterClrMapping/>
+  </p:clrMapOvr>
+</p:notes>
+</file>
+
+<file path=ppt/notesSlides/notesSlide9.xml><?xml version="1.0" encoding="utf-8"?>
+<p:notes xmlns:a="http://schemas.openxmlformats.org/drawingml/2006/main" xmlns:r="http://schemas.openxmlformats.org/officeDocument/2006/relationships" xmlns:p="http://schemas.openxmlformats.org/presentationml/2006/main">
+  <p:cSld>
+    <p:spTree>
+      <p:nvGrpSpPr>
+        <p:cNvPr id="1" name=""/>
+        <p:cNvGrpSpPr/>
+        <p:nvPr/>
+      </p:nvGrpSpPr>
+      <p:grpSpPr>
+        <a:xfrm>
+          <a:off x="0" y="0"/>
+          <a:ext cx="0" cy="0"/>
+          <a:chOff x="0" y="0"/>
+          <a:chExt cx="0" cy="0"/>
+        </a:xfrm>
+      </p:grpSpPr>
+      <p:sp>
+        <p:nvSpPr>
+          <p:cNvPr id="2" name="Slide Image Placeholder 1"/>
+          <p:cNvSpPr>
+            <a:spLocks noGrp="1" noRot="1" noChangeAspect="1"/>
+          </p:cNvSpPr>
+          <p:nvPr>
+            <p:ph type="sldImg"/>
+          </p:nvPr>
+        </p:nvSpPr>
+        <p:spPr/>
+      </p:sp>
+      <p:sp>
+        <p:nvSpPr>
+          <p:cNvPr id="3" name="Notes Placeholder 2"/>
+          <p:cNvSpPr>
+            <a:spLocks noGrp="1"/>
+          </p:cNvSpPr>
+          <p:nvPr>
+            <p:ph type="body" idx="1"/>
+          </p:nvPr>
+        </p:nvSpPr>
+        <p:spPr/>
+        <p:txBody>
+          <a:bodyPr/>
+          <a:lstStyle/>
+          <a:p>
+            <a:r>
+              <a:rPr lang="en-US" dirty="0"/>
+              <a:t/>
+            </a:r>
+            <a:endParaRPr lang="en-US" dirty="0"/>
+          </a:p>
+        </p:txBody>
+      </p:sp>
+      <p:sp>
+        <p:nvSpPr>
+          <p:cNvPr id="4" name="Slide Number Placeholder 3"/>
+          <p:cNvSpPr>
+            <a:spLocks noGrp="1"/>
+          </p:cNvSpPr>
+          <p:nvPr>
+            <p:ph type="sldNum" sz="quarter" idx="10"/>
+          </p:nvPr>
+        </p:nvSpPr>
+        <p:spPr/>
+        <p:txBody>
+          <a:bodyPr/>
+          <a:lstStyle/>
+          <a:p>
+            <a:fld id="{F7021451-1387-4CA6-816F-3879F97B5CBC}" type="slidenum">
+              <a:rPr lang="en-US"/>
+              <a:t>9</a:t>
             </a:fld>
             <a:endParaRPr lang="en-US"/>
           </a:p>
@@ -5355,7 +5444,7 @@
       </p:sp>
       <p:pic>
         <p:nvPicPr>
-          <p:cNvPr id="36" name="Image 6" descr="/home/claude/deck/icons/grid.png">    </p:cNvPr>
+          <p:cNvPr id="36" name="Image 6" descr="/home/claude/deck/icons/film.png">    </p:cNvPr>
           <p:cNvPicPr>
             <a:picLocks noChangeAspect="1"/>
           </p:cNvPicPr>
@@ -5410,7 +5499,7 @@
                 <a:ea typeface="Calibri" pitchFamily="34" charset="-122"/>
                 <a:cs typeface="Calibri" pitchFamily="34" charset="-120"/>
               </a:rPr>
-              <a:t>Three formats</a:t>
+              <a:t>YouTube-friendly</a:t>
             </a:r>
             <a:endParaRPr lang="en-US" sz="1350" dirty="0"/>
           </a:p>
@@ -5452,7 +5541,7 @@
                 <a:ea typeface="Calibri" pitchFamily="34" charset="-122"/>
                 <a:cs typeface="Calibri" pitchFamily="34" charset="-120"/>
               </a:rPr>
-              <a:t>PNG, JPEG, or WebP, each with a live compression comparison</a:t>
+              <a:t>Links out to a downloader to save a video first, then drop it in</a:t>
             </a:r>
             <a:endParaRPr lang="en-US" sz="1050" dirty="0"/>
           </a:p>
@@ -5507,7 +5596,7 @@
       </p:sp>
       <p:pic>
         <p:nvPicPr>
-          <p:cNvPr id="41" name="Image 7" descr="/home/claude/deck/icons/check.png">    </p:cNvPr>
+          <p:cNvPr id="41" name="Image 7" descr="/home/claude/deck/icons/eye.png">    </p:cNvPr>
           <p:cNvPicPr>
             <a:picLocks noChangeAspect="1"/>
           </p:cNvPicPr>
@@ -5562,7 +5651,7 @@
                 <a:ea typeface="Calibri" pitchFamily="34" charset="-122"/>
                 <a:cs typeface="Calibri" pitchFamily="34" charset="-120"/>
               </a:rPr>
-              <a:t>Resumable sessions</a:t>
+              <a:t>Frame filters</a:t>
             </a:r>
             <a:endParaRPr lang="en-US" sz="1350" dirty="0"/>
           </a:p>
@@ -5604,7 +5693,7 @@
                 <a:ea typeface="Calibri" pitchFamily="34" charset="-122"/>
                 <a:cs typeface="Calibri" pitchFamily="34" charset="-120"/>
               </a:rPr>
-              <a:t>Captured cards persist locally — a refresh doesn't lose the work</a:t>
+              <a:t>Skip near-blank frames, or lock onto single-toned footage like sepia or chalkboard</a:t>
             </a:r>
             <a:endParaRPr lang="en-US" sz="1050" dirty="0"/>
           </a:p>
@@ -6343,7 +6432,7 @@
                 <a:ea typeface="Courier New" pitchFamily="34" charset="-122"/>
                 <a:cs typeface="Courier New" pitchFamily="34" charset="-120"/>
               </a:rPr>
-              <a:t>GETTING YOUR CARDS OUT</a:t>
+              <a:t>FRAME-LEVEL CONTROL</a:t>
             </a:r>
             <a:endParaRPr lang="en-US" sz="1100" dirty="0"/>
           </a:p>
@@ -6358,23 +6447,23 @@
         <p:spPr>
           <a:xfrm>
             <a:off x="548640" y="777240"/>
-            <a:ext cx="10515600" cy="640080"/>
-          </a:xfrm>
-          <a:prstGeom prst="rect">
-            <a:avLst/>
-          </a:prstGeom>
-          <a:noFill/>
-          <a:ln/>
-        </p:spPr>
-        <p:txBody>
-          <a:bodyPr wrap="square" lIns="0" tIns="0" rIns="0" bIns="0" rtlCol="0" anchor="ctr"/>
-          <a:lstStyle/>
-          <a:p>
-            <a:pPr indent="0" marL="0">
-              <a:buNone/>
-            </a:pPr>
-            <a:r>
-              <a:rPr lang="en-US" sz="3000" b="1" dirty="0">
+            <a:ext cx="10789920" cy="640080"/>
+          </a:xfrm>
+          <a:prstGeom prst="rect">
+            <a:avLst/>
+          </a:prstGeom>
+          <a:noFill/>
+          <a:ln/>
+        </p:spPr>
+        <p:txBody>
+          <a:bodyPr wrap="square" lIns="0" tIns="0" rIns="0" bIns="0" rtlCol="0" anchor="ctr"/>
+          <a:lstStyle/>
+          <a:p>
+            <a:pPr indent="0" marL="0">
+              <a:buNone/>
+            </a:pPr>
+            <a:r>
+              <a:rPr lang="en-US" sz="2900" b="1" dirty="0">
                 <a:solidFill>
                   <a:srgbClr val="141C2B"/>
                 </a:solidFill>
@@ -6382,9 +6471,9 @@
                 <a:ea typeface="Calibri" pitchFamily="34" charset="-122"/>
                 <a:cs typeface="Calibri" pitchFamily="34" charset="-120"/>
               </a:rPr>
-              <a:t>Three ways to leave with your collection</a:t>
-            </a:r>
-            <a:endParaRPr lang="en-US" sz="3000" dirty="0"/>
+              <a:t>Built with an edit bay’s instincts, not just a scanner’s</a:t>
+            </a:r>
+            <a:endParaRPr lang="en-US" sz="2900" dirty="0"/>
           </a:p>
         </p:txBody>
       </p:sp>
@@ -6437,7 +6526,7 @@
       </p:sp>
       <p:pic>
         <p:nvPicPr>
-          <p:cNvPr id="6" name="Image 0" descr="/home/claude/deck/icons/folder.png">    </p:cNvPr>
+          <p:cNvPr id="6" name="Image 0" descr="/home/claude/deck/icons/scissors.png">    </p:cNvPr>
           <p:cNvPicPr>
             <a:picLocks noChangeAspect="1"/>
           </p:cNvPicPr>
@@ -6492,7 +6581,7 @@
                 <a:ea typeface="Courier New" pitchFamily="34" charset="-122"/>
                 <a:cs typeface="Courier New" pitchFamily="34" charset="-120"/>
               </a:rPr>
-              <a:t>FASTEST</a:t>
+              <a:t>MARK IT</a:t>
             </a:r>
             <a:endParaRPr lang="en-US" sz="950" dirty="0"/>
           </a:p>
@@ -6523,7 +6612,7 @@
               <a:buNone/>
             </a:pPr>
             <a:r>
-              <a:rPr lang="en-US" sz="1700" b="1" dirty="0">
+              <a:rPr lang="en-US" sz="1600" b="1" dirty="0">
                 <a:solidFill>
                   <a:srgbClr val="141C2B"/>
                 </a:solidFill>
@@ -6531,9 +6620,9 @@
                 <a:ea typeface="Calibri" pitchFamily="34" charset="-122"/>
                 <a:cs typeface="Calibri" pitchFamily="34" charset="-120"/>
               </a:rPr>
-              <a:t>Direct-to-folder</a:t>
-            </a:r>
-            <a:endParaRPr lang="en-US" sz="1700" dirty="0"/>
+              <a:t>In/out points</a:t>
+            </a:r>
+            <a:endParaRPr lang="en-US" sz="1600" dirty="0"/>
           </a:p>
         </p:txBody>
       </p:sp>
@@ -6566,7 +6655,7 @@
         <p:spPr>
           <a:xfrm>
             <a:off x="1051560" y="2807208"/>
-            <a:ext cx="2743200" cy="640080"/>
+            <a:ext cx="2743200" cy="777240"/>
           </a:xfrm>
           <a:prstGeom prst="rect">
             <a:avLst/>
@@ -6585,7 +6674,7 @@
               <a:buNone/>
             </a:pPr>
             <a:r>
-              <a:rPr lang="en-US" sz="1200" dirty="0">
+              <a:rPr lang="en-US" sz="1150" dirty="0">
                 <a:solidFill>
                   <a:srgbClr val="3A4658"/>
                 </a:solidFill>
@@ -6593,9 +6682,9 @@
                 <a:ea typeface="Calibri" pitchFamily="34" charset="-122"/>
                 <a:cs typeface="Calibri" pitchFamily="34" charset="-120"/>
               </a:rPr>
-              <a:t>Writes each card the moment it is captured</a:t>
-            </a:r>
-            <a:endParaRPr lang="en-US" sz="1200" dirty="0"/>
+              <a:t>Set a start and end point, like a rough edit</a:t>
+            </a:r>
+            <a:endParaRPr lang="en-US" sz="1150" dirty="0"/>
           </a:p>
         </p:txBody>
       </p:sp>
@@ -6607,7 +6696,7 @@
         </p:nvSpPr>
         <p:spPr>
           <a:xfrm>
-            <a:off x="822960" y="3794760"/>
+            <a:off x="822960" y="3886200"/>
             <a:ext cx="91440" cy="91440"/>
           </a:xfrm>
           <a:prstGeom prst="ellipse">
@@ -6627,8 +6716,8 @@
         </p:nvSpPr>
         <p:spPr>
           <a:xfrm>
-            <a:off x="1051560" y="3648456"/>
-            <a:ext cx="2743200" cy="640080"/>
+            <a:off x="1051560" y="3739896"/>
+            <a:ext cx="2743200" cy="777240"/>
           </a:xfrm>
           <a:prstGeom prst="rect">
             <a:avLst/>
@@ -6647,7 +6736,7 @@
               <a:buNone/>
             </a:pPr>
             <a:r>
-              <a:rPr lang="en-US" sz="1200" dirty="0">
+              <a:rPr lang="en-US" sz="1150" dirty="0">
                 <a:solidFill>
                   <a:srgbClr val="3A4658"/>
                 </a:solidFill>
@@ -6655,9 +6744,9 @@
                 <a:ea typeface="Calibri" pitchFamily="34" charset="-122"/>
                 <a:cs typeface="Calibri" pitchFamily="34" charset="-120"/>
               </a:rPr>
-              <a:t>No zip step, no waiting at the end</a:t>
-            </a:r>
-            <a:endParaRPr lang="en-US" sz="1200" dirty="0"/>
+              <a:t>Scanning only runs across that section</a:t>
+            </a:r>
+            <a:endParaRPr lang="en-US" sz="1150" dirty="0"/>
           </a:p>
         </p:txBody>
       </p:sp>
@@ -6669,7 +6758,7 @@
         </p:nvSpPr>
         <p:spPr>
           <a:xfrm>
-            <a:off x="822960" y="4636008"/>
+            <a:off x="822960" y="4818888"/>
             <a:ext cx="91440" cy="91440"/>
           </a:xfrm>
           <a:prstGeom prst="ellipse">
@@ -6689,8 +6778,8 @@
         </p:nvSpPr>
         <p:spPr>
           <a:xfrm>
-            <a:off x="1051560" y="4489704"/>
-            <a:ext cx="2743200" cy="640080"/>
+            <a:off x="1051560" y="4672584"/>
+            <a:ext cx="2743200" cy="777240"/>
           </a:xfrm>
           <a:prstGeom prst="rect">
             <a:avLst/>
@@ -6709,7 +6798,7 @@
               <a:buNone/>
             </a:pPr>
             <a:r>
-              <a:rPr lang="en-US" sz="1200" dirty="0">
+              <a:rPr lang="en-US" sz="1150" dirty="0">
                 <a:solidFill>
                   <a:srgbClr val="3A4658"/>
                 </a:solidFill>
@@ -6717,9 +6806,9 @@
                 <a:ea typeface="Calibri" pitchFamily="34" charset="-122"/>
                 <a:cs typeface="Calibri" pitchFamily="34" charset="-120"/>
               </a:rPr>
-              <a:t>Chromium-based browsers only</a:t>
-            </a:r>
-            <a:endParaRPr lang="en-US" sz="1200" dirty="0"/>
+              <a:t>A visual range bar shows the selection</a:t>
+            </a:r>
+            <a:endParaRPr lang="en-US" sz="1150" dirty="0"/>
           </a:p>
         </p:txBody>
       </p:sp>
@@ -6772,7 +6861,7 @@
       </p:sp>
       <p:pic>
         <p:nvPicPr>
-          <p:cNvPr id="17" name="Image 1" descr="/home/claude/deck/icons/grid.png">    </p:cNvPr>
+          <p:cNvPr id="17" name="Image 1" descr="/home/claude/deck/icons/stepforward.png">    </p:cNvPr>
           <p:cNvPicPr>
             <a:picLocks noChangeAspect="1"/>
           </p:cNvPicPr>
@@ -6827,7 +6916,7 @@
                 <a:ea typeface="Courier New" pitchFamily="34" charset="-122"/>
                 <a:cs typeface="Courier New" pitchFamily="34" charset="-120"/>
               </a:rPr>
-              <a:t>MOST PORTABLE</a:t>
+              <a:t>STEP THROUGH</a:t>
             </a:r>
             <a:endParaRPr lang="en-US" sz="950" dirty="0"/>
           </a:p>
@@ -6858,7 +6947,7 @@
               <a:buNone/>
             </a:pPr>
             <a:r>
-              <a:rPr lang="en-US" sz="1700" b="1" dirty="0">
+              <a:rPr lang="en-US" sz="1600" b="1" dirty="0">
                 <a:solidFill>
                   <a:srgbClr val="141C2B"/>
                 </a:solidFill>
@@ -6866,9 +6955,9 @@
                 <a:ea typeface="Calibri" pitchFamily="34" charset="-122"/>
                 <a:cs typeface="Calibri" pitchFamily="34" charset="-120"/>
               </a:rPr>
-              <a:t>Zip archive</a:t>
-            </a:r>
-            <a:endParaRPr lang="en-US" sz="1700" dirty="0"/>
+              <a:t>Frame-accurate stepping</a:t>
+            </a:r>
+            <a:endParaRPr lang="en-US" sz="1600" dirty="0"/>
           </a:p>
         </p:txBody>
       </p:sp>
@@ -6901,7 +6990,7 @@
         <p:spPr>
           <a:xfrm>
             <a:off x="4773168" y="2807208"/>
-            <a:ext cx="2743200" cy="640080"/>
+            <a:ext cx="2743200" cy="777240"/>
           </a:xfrm>
           <a:prstGeom prst="rect">
             <a:avLst/>
@@ -6920,7 +7009,7 @@
               <a:buNone/>
             </a:pPr>
             <a:r>
-              <a:rPr lang="en-US" sz="1200" dirty="0">
+              <a:rPr lang="en-US" sz="1150" dirty="0">
                 <a:solidFill>
                   <a:srgbClr val="3A4658"/>
                 </a:solidFill>
@@ -6928,9 +7017,9 @@
                 <a:ea typeface="Calibri" pitchFamily="34" charset="-122"/>
                 <a:cs typeface="Calibri" pitchFamily="34" charset="-120"/>
               </a:rPr>
-              <a:t>PNG, JPEG, or WebP — your choice of format</a:t>
-            </a:r>
-            <a:endParaRPr lang="en-US" sz="1200" dirty="0"/>
+              <a:t>Step back or forward 1 or 10 frames at a time</a:t>
+            </a:r>
+            <a:endParaRPr lang="en-US" sz="1150" dirty="0"/>
           </a:p>
         </p:txBody>
       </p:sp>
@@ -6942,7 +7031,7 @@
         </p:nvSpPr>
         <p:spPr>
           <a:xfrm>
-            <a:off x="4544568" y="3794760"/>
+            <a:off x="4544568" y="3886200"/>
             <a:ext cx="91440" cy="91440"/>
           </a:xfrm>
           <a:prstGeom prst="ellipse">
@@ -6962,8 +7051,8 @@
         </p:nvSpPr>
         <p:spPr>
           <a:xfrm>
-            <a:off x="4773168" y="3648456"/>
-            <a:ext cx="2743200" cy="640080"/>
+            <a:off x="4773168" y="3739896"/>
+            <a:ext cx="2743200" cy="777240"/>
           </a:xfrm>
           <a:prstGeom prst="rect">
             <a:avLst/>
@@ -6982,7 +7071,7 @@
               <a:buNone/>
             </a:pPr>
             <a:r>
-              <a:rPr lang="en-US" sz="1200" dirty="0">
+              <a:rPr lang="en-US" sz="1150" dirty="0">
                 <a:solidFill>
                   <a:srgbClr val="3A4658"/>
                 </a:solidFill>
@@ -6990,9 +7079,9 @@
                 <a:ea typeface="Calibri" pitchFamily="34" charset="-122"/>
                 <a:cs typeface="Calibri" pitchFamily="34" charset="-120"/>
               </a:rPr>
-              <a:t>Includes a manifest.md with timestamps</a:t>
-            </a:r>
-            <a:endParaRPr lang="en-US" sz="1200" dirty="0"/>
+              <a:t>Set your own frame rate to match the footage</a:t>
+            </a:r>
+            <a:endParaRPr lang="en-US" sz="1150" dirty="0"/>
           </a:p>
         </p:txBody>
       </p:sp>
@@ -7004,7 +7093,7 @@
         </p:nvSpPr>
         <p:spPr>
           <a:xfrm>
-            <a:off x="4544568" y="4636008"/>
+            <a:off x="4544568" y="4818888"/>
             <a:ext cx="91440" cy="91440"/>
           </a:xfrm>
           <a:prstGeom prst="ellipse">
@@ -7024,8 +7113,8 @@
         </p:nvSpPr>
         <p:spPr>
           <a:xfrm>
-            <a:off x="4773168" y="4489704"/>
-            <a:ext cx="2743200" cy="640080"/>
+            <a:off x="4773168" y="4672584"/>
+            <a:ext cx="2743200" cy="777240"/>
           </a:xfrm>
           <a:prstGeom prst="rect">
             <a:avLst/>
@@ -7044,7 +7133,7 @@
               <a:buNone/>
             </a:pPr>
             <a:r>
-              <a:rPr lang="en-US" sz="1200" dirty="0">
+              <a:rPr lang="en-US" sz="1150" dirty="0">
                 <a:solidFill>
                   <a:srgbClr val="3A4658"/>
                 </a:solidFill>
@@ -7052,9 +7141,9 @@
                 <a:ea typeface="Calibri" pitchFamily="34" charset="-122"/>
                 <a:cs typeface="Calibri" pitchFamily="34" charset="-120"/>
               </a:rPr>
-              <a:t>Works in every browser</a:t>
-            </a:r>
-            <a:endParaRPr lang="en-US" sz="1200" dirty="0"/>
+              <a:t>Land exactly where you need before marking or capturing</a:t>
+            </a:r>
+            <a:endParaRPr lang="en-US" sz="1150" dirty="0"/>
           </a:p>
         </p:txBody>
       </p:sp>
@@ -7107,7 +7196,7 @@
       </p:sp>
       <p:pic>
         <p:nvPicPr>
-          <p:cNvPr id="28" name="Image 2" descr="/home/claude/deck/icons/filetext.png">    </p:cNvPr>
+          <p:cNvPr id="28" name="Image 2" descr="/home/claude/deck/icons/video.png">    </p:cNvPr>
           <p:cNvPicPr>
             <a:picLocks noChangeAspect="1"/>
           </p:cNvPicPr>
@@ -7162,7 +7251,7 @@
                 <a:ea typeface="Courier New" pitchFamily="34" charset="-122"/>
                 <a:cs typeface="Courier New" pitchFamily="34" charset="-120"/>
               </a:rPr>
-              <a:t>MOST READABLE</a:t>
+              <a:t>PULL THE CLIP</a:t>
             </a:r>
             <a:endParaRPr lang="en-US" sz="950" dirty="0"/>
           </a:p>
@@ -7193,7 +7282,7 @@
               <a:buNone/>
             </a:pPr>
             <a:r>
-              <a:rPr lang="en-US" sz="1700" b="1" dirty="0">
+              <a:rPr lang="en-US" sz="1600" b="1" dirty="0">
                 <a:solidFill>
                   <a:srgbClr val="141C2B"/>
                 </a:solidFill>
@@ -7201,9 +7290,9 @@
                 <a:ea typeface="Calibri" pitchFamily="34" charset="-122"/>
                 <a:cs typeface="Calibri" pitchFamily="34" charset="-120"/>
               </a:rPr>
-              <a:t>Single PDF</a:t>
-            </a:r>
-            <a:endParaRPr lang="en-US" sz="1700" dirty="0"/>
+              <a:t>Export as video</a:t>
+            </a:r>
+            <a:endParaRPr lang="en-US" sz="1600" dirty="0"/>
           </a:p>
         </p:txBody>
       </p:sp>
@@ -7236,7 +7325,7 @@
         <p:spPr>
           <a:xfrm>
             <a:off x="8494776" y="2807208"/>
-            <a:ext cx="2743200" cy="640080"/>
+            <a:ext cx="2743200" cy="777240"/>
           </a:xfrm>
           <a:prstGeom prst="rect">
             <a:avLst/>
@@ -7255,7 +7344,7 @@
               <a:buNone/>
             </a:pPr>
             <a:r>
-              <a:rPr lang="en-US" sz="1200" dirty="0">
+              <a:rPr lang="en-US" sz="1150" dirty="0">
                 <a:solidFill>
                   <a:srgbClr val="3A4658"/>
                 </a:solidFill>
@@ -7263,9 +7352,9 @@
                 <a:ea typeface="Calibri" pitchFamily="34" charset="-122"/>
                 <a:cs typeface="Calibri" pitchFamily="34" charset="-120"/>
               </a:rPr>
-              <a:t>One page per card, captioned and timestamped</a:t>
-            </a:r>
-            <a:endParaRPr lang="en-US" sz="1200" dirty="0"/>
+              <a:t>Records the marked section back out as its own file</a:t>
+            </a:r>
+            <a:endParaRPr lang="en-US" sz="1150" dirty="0"/>
           </a:p>
         </p:txBody>
       </p:sp>
@@ -7277,7 +7366,7 @@
         </p:nvSpPr>
         <p:spPr>
           <a:xfrm>
-            <a:off x="8266176" y="3794760"/>
+            <a:off x="8266176" y="3886200"/>
             <a:ext cx="91440" cy="91440"/>
           </a:xfrm>
           <a:prstGeom prst="ellipse">
@@ -7297,8 +7386,8 @@
         </p:nvSpPr>
         <p:spPr>
           <a:xfrm>
-            <a:off x="8494776" y="3648456"/>
-            <a:ext cx="2743200" cy="640080"/>
+            <a:off x="8494776" y="3739896"/>
+            <a:ext cx="2743200" cy="777240"/>
           </a:xfrm>
           <a:prstGeom prst="rect">
             <a:avLst/>
@@ -7317,7 +7406,7 @@
               <a:buNone/>
             </a:pPr>
             <a:r>
-              <a:rPr lang="en-US" sz="1200" dirty="0">
+              <a:rPr lang="en-US" sz="1150" dirty="0">
                 <a:solidFill>
                   <a:srgbClr val="3A4658"/>
                 </a:solidFill>
@@ -7325,9 +7414,9 @@
                 <a:ea typeface="Calibri" pitchFamily="34" charset="-122"/>
                 <a:cs typeface="Calibri" pitchFamily="34" charset="-120"/>
               </a:rPr>
-              <a:t>OCR text included beneath each image</a:t>
-            </a:r>
-            <a:endParaRPr lang="en-US" sz="1200" dirty="0"/>
+              <a:t>MP4 where the browser supports it, WebM everywhere else</a:t>
+            </a:r>
+            <a:endParaRPr lang="en-US" sz="1150" dirty="0"/>
           </a:p>
         </p:txBody>
       </p:sp>
@@ -7339,7 +7428,7 @@
         </p:nvSpPr>
         <p:spPr>
           <a:xfrm>
-            <a:off x="8266176" y="4636008"/>
+            <a:off x="8266176" y="4818888"/>
             <a:ext cx="91440" cy="91440"/>
           </a:xfrm>
           <a:prstGeom prst="ellipse">
@@ -7359,8 +7448,8 @@
         </p:nvSpPr>
         <p:spPr>
           <a:xfrm>
-            <a:off x="8494776" y="4489704"/>
-            <a:ext cx="2743200" cy="640080"/>
+            <a:off x="8494776" y="4672584"/>
+            <a:ext cx="2743200" cy="777240"/>
           </a:xfrm>
           <a:prstGeom prst="rect">
             <a:avLst/>
@@ -7379,7 +7468,7 @@
               <a:buNone/>
             </a:pPr>
             <a:r>
-              <a:rPr lang="en-US" sz="1200" dirty="0">
+              <a:rPr lang="en-US" sz="1150" dirty="0">
                 <a:solidFill>
                   <a:srgbClr val="3A4658"/>
                 </a:solidFill>
@@ -7387,9 +7476,9 @@
                 <a:ea typeface="Calibri" pitchFamily="34" charset="-122"/>
                 <a:cs typeface="Calibri" pitchFamily="34" charset="-120"/>
               </a:rPr>
-              <a:t>Optional uniform page size, never cropped</a:t>
-            </a:r>
-            <a:endParaRPr lang="en-US" sz="1200" dirty="0"/>
+              <a:t>Built on native browser recording — no extra library required</a:t>
+            </a:r>
+            <a:endParaRPr lang="en-US" sz="1150" dirty="0"/>
           </a:p>
         </p:txBody>
       </p:sp>
@@ -7443,6 +7532,1160 @@
 <file path=ppt/slides/slide7.xml><?xml version="1.0" encoding="utf-8"?>
 <p:sld xmlns:a="http://schemas.openxmlformats.org/drawingml/2006/main" xmlns:r="http://schemas.openxmlformats.org/officeDocument/2006/relationships" xmlns:p="http://schemas.openxmlformats.org/presentationml/2006/main">
   <p:cSld name="Slide 7">
+    <p:bg>
+      <p:bgPr>
+        <a:solidFill>
+          <a:srgbClr val="FFFFFF"/>
+        </a:solidFill>
+      </p:bgPr>
+    </p:bg>
+    <p:spTree>
+      <p:nvGrpSpPr>
+        <p:cNvPr id="1" name=""/>
+        <p:cNvGrpSpPr/>
+        <p:nvPr/>
+      </p:nvGrpSpPr>
+      <p:grpSpPr>
+        <a:xfrm>
+          <a:off x="0" y="0"/>
+          <a:ext cx="0" cy="0"/>
+          <a:chOff x="0" y="0"/>
+          <a:chExt cx="0" cy="0"/>
+        </a:xfrm>
+      </p:grpSpPr>
+      <p:sp>
+        <p:nvSpPr>
+          <p:cNvPr id="2" name="Text 0"/>
+          <p:cNvSpPr txBox="1"/>
+          <p:nvPr/>
+        </p:nvSpPr>
+        <p:spPr>
+          <a:xfrm>
+            <a:off x="548640" y="411480"/>
+            <a:ext cx="7315200" cy="320040"/>
+          </a:xfrm>
+          <a:prstGeom prst="rect">
+            <a:avLst/>
+          </a:prstGeom>
+          <a:noFill/>
+          <a:ln/>
+        </p:spPr>
+        <p:txBody>
+          <a:bodyPr wrap="square" lIns="0" tIns="0" rIns="0" bIns="0" rtlCol="0" anchor="ctr"/>
+          <a:lstStyle/>
+          <a:p>
+            <a:pPr indent="0" marL="0">
+              <a:buNone/>
+            </a:pPr>
+            <a:r>
+              <a:rPr lang="en-US" sz="1100" spc="200" kern="0" dirty="0">
+                <a:solidFill>
+                  <a:srgbClr val="1C4BB3"/>
+                </a:solidFill>
+                <a:latin typeface="Courier New" pitchFamily="34" charset="0"/>
+                <a:ea typeface="Courier New" pitchFamily="34" charset="-122"/>
+                <a:cs typeface="Courier New" pitchFamily="34" charset="-120"/>
+              </a:rPr>
+              <a:t>GETTING YOUR CARDS OUT</a:t>
+            </a:r>
+            <a:endParaRPr lang="en-US" sz="1100" dirty="0"/>
+          </a:p>
+        </p:txBody>
+      </p:sp>
+      <p:sp>
+        <p:nvSpPr>
+          <p:cNvPr id="3" name="Text 1"/>
+          <p:cNvSpPr txBox="1"/>
+          <p:nvPr/>
+        </p:nvSpPr>
+        <p:spPr>
+          <a:xfrm>
+            <a:off x="548640" y="777240"/>
+            <a:ext cx="10515600" cy="640080"/>
+          </a:xfrm>
+          <a:prstGeom prst="rect">
+            <a:avLst/>
+          </a:prstGeom>
+          <a:noFill/>
+          <a:ln/>
+        </p:spPr>
+        <p:txBody>
+          <a:bodyPr wrap="square" lIns="0" tIns="0" rIns="0" bIns="0" rtlCol="0" anchor="ctr"/>
+          <a:lstStyle/>
+          <a:p>
+            <a:pPr indent="0" marL="0">
+              <a:buNone/>
+            </a:pPr>
+            <a:r>
+              <a:rPr lang="en-US" sz="3000" b="1" dirty="0">
+                <a:solidFill>
+                  <a:srgbClr val="141C2B"/>
+                </a:solidFill>
+                <a:latin typeface="Calibri" pitchFamily="34" charset="0"/>
+                <a:ea typeface="Calibri" pitchFamily="34" charset="-122"/>
+                <a:cs typeface="Calibri" pitchFamily="34" charset="-120"/>
+              </a:rPr>
+              <a:t>Three ways to leave with your collection</a:t>
+            </a:r>
+            <a:endParaRPr lang="en-US" sz="3000" dirty="0"/>
+          </a:p>
+        </p:txBody>
+      </p:sp>
+      <p:sp>
+        <p:nvSpPr>
+          <p:cNvPr id="4" name="Shape 2"/>
+          <p:cNvSpPr/>
+          <p:nvPr/>
+        </p:nvSpPr>
+        <p:spPr>
+          <a:xfrm>
+            <a:off x="548640" y="1691640"/>
+            <a:ext cx="3520440" cy="4114800"/>
+          </a:xfrm>
+          <a:prstGeom prst="roundRect">
+            <a:avLst>
+              <a:gd name="adj" fmla="val 2597"/>
+            </a:avLst>
+          </a:prstGeom>
+          <a:solidFill>
+            <a:srgbClr val="F6F8FB"/>
+          </a:solidFill>
+          <a:ln w="12700">
+            <a:solidFill>
+              <a:srgbClr val="E7EBF1"/>
+            </a:solidFill>
+            <a:prstDash val="solid"/>
+          </a:ln>
+        </p:spPr>
+      </p:sp>
+      <p:sp>
+        <p:nvSpPr>
+          <p:cNvPr id="5" name="Shape 3"/>
+          <p:cNvSpPr/>
+          <p:nvPr/>
+        </p:nvSpPr>
+        <p:spPr>
+          <a:xfrm>
+            <a:off x="822960" y="1920240"/>
+            <a:ext cx="658368" cy="658368"/>
+          </a:xfrm>
+          <a:prstGeom prst="ellipse">
+            <a:avLst/>
+          </a:prstGeom>
+          <a:solidFill>
+            <a:srgbClr val="2F6FED"/>
+          </a:solidFill>
+          <a:ln/>
+        </p:spPr>
+      </p:sp>
+      <p:pic>
+        <p:nvPicPr>
+          <p:cNvPr id="6" name="Image 0" descr="/home/claude/deck/icons/folder.png">    </p:cNvPr>
+          <p:cNvPicPr>
+            <a:picLocks noChangeAspect="1"/>
+          </p:cNvPicPr>
+          <p:nvPr/>
+        </p:nvPicPr>
+        <p:blipFill>
+          <a:blip r:embed="rId1"/>
+          <a:stretch>
+            <a:fillRect/>
+          </a:stretch>
+        </p:blipFill>
+        <p:spPr>
+          <a:xfrm>
+            <a:off x="987552" y="2084832"/>
+            <a:ext cx="329184" cy="329184"/>
+          </a:xfrm>
+          <a:prstGeom prst="rect">
+            <a:avLst/>
+          </a:prstGeom>
+        </p:spPr>
+      </p:pic>
+      <p:sp>
+        <p:nvSpPr>
+          <p:cNvPr id="7" name="Text 4"/>
+          <p:cNvSpPr txBox="1"/>
+          <p:nvPr/>
+        </p:nvSpPr>
+        <p:spPr>
+          <a:xfrm>
+            <a:off x="1645920" y="1993392"/>
+            <a:ext cx="2194560" cy="274320"/>
+          </a:xfrm>
+          <a:prstGeom prst="rect">
+            <a:avLst/>
+          </a:prstGeom>
+          <a:noFill/>
+          <a:ln/>
+        </p:spPr>
+        <p:txBody>
+          <a:bodyPr wrap="square" lIns="0" tIns="0" rIns="0" bIns="0" rtlCol="0" anchor="ctr"/>
+          <a:lstStyle/>
+          <a:p>
+            <a:pPr indent="0" marL="0">
+              <a:buNone/>
+            </a:pPr>
+            <a:r>
+              <a:rPr lang="en-US" sz="950" spc="100" kern="0" dirty="0">
+                <a:solidFill>
+                  <a:srgbClr val="1C4BB3"/>
+                </a:solidFill>
+                <a:latin typeface="Courier New" pitchFamily="34" charset="0"/>
+                <a:ea typeface="Courier New" pitchFamily="34" charset="-122"/>
+                <a:cs typeface="Courier New" pitchFamily="34" charset="-120"/>
+              </a:rPr>
+              <a:t>FASTEST</a:t>
+            </a:r>
+            <a:endParaRPr lang="en-US" sz="950" dirty="0"/>
+          </a:p>
+        </p:txBody>
+      </p:sp>
+      <p:sp>
+        <p:nvSpPr>
+          <p:cNvPr id="8" name="Text 5"/>
+          <p:cNvSpPr txBox="1"/>
+          <p:nvPr/>
+        </p:nvSpPr>
+        <p:spPr>
+          <a:xfrm>
+            <a:off x="1645920" y="2212848"/>
+            <a:ext cx="2286000" cy="411480"/>
+          </a:xfrm>
+          <a:prstGeom prst="rect">
+            <a:avLst/>
+          </a:prstGeom>
+          <a:noFill/>
+          <a:ln/>
+        </p:spPr>
+        <p:txBody>
+          <a:bodyPr wrap="square" lIns="0" tIns="0" rIns="0" bIns="0" rtlCol="0" anchor="ctr"/>
+          <a:lstStyle/>
+          <a:p>
+            <a:pPr indent="0" marL="0">
+              <a:buNone/>
+            </a:pPr>
+            <a:r>
+              <a:rPr lang="en-US" sz="1700" b="1" dirty="0">
+                <a:solidFill>
+                  <a:srgbClr val="141C2B"/>
+                </a:solidFill>
+                <a:latin typeface="Calibri" pitchFamily="34" charset="0"/>
+                <a:ea typeface="Calibri" pitchFamily="34" charset="-122"/>
+                <a:cs typeface="Calibri" pitchFamily="34" charset="-120"/>
+              </a:rPr>
+              <a:t>Direct-to-folder</a:t>
+            </a:r>
+            <a:endParaRPr lang="en-US" sz="1700" dirty="0"/>
+          </a:p>
+        </p:txBody>
+      </p:sp>
+      <p:sp>
+        <p:nvSpPr>
+          <p:cNvPr id="9" name="Shape 6"/>
+          <p:cNvSpPr/>
+          <p:nvPr/>
+        </p:nvSpPr>
+        <p:spPr>
+          <a:xfrm>
+            <a:off x="822960" y="2953512"/>
+            <a:ext cx="91440" cy="91440"/>
+          </a:xfrm>
+          <a:prstGeom prst="ellipse">
+            <a:avLst/>
+          </a:prstGeom>
+          <a:solidFill>
+            <a:srgbClr val="2F6FED"/>
+          </a:solidFill>
+          <a:ln/>
+        </p:spPr>
+      </p:sp>
+      <p:sp>
+        <p:nvSpPr>
+          <p:cNvPr id="10" name="Text 7"/>
+          <p:cNvSpPr txBox="1"/>
+          <p:nvPr/>
+        </p:nvSpPr>
+        <p:spPr>
+          <a:xfrm>
+            <a:off x="1051560" y="2807208"/>
+            <a:ext cx="2743200" cy="640080"/>
+          </a:xfrm>
+          <a:prstGeom prst="rect">
+            <a:avLst/>
+          </a:prstGeom>
+          <a:noFill/>
+          <a:ln/>
+        </p:spPr>
+        <p:txBody>
+          <a:bodyPr wrap="square" lIns="0" tIns="0" rIns="0" bIns="0" rtlCol="0" anchor="ctr"/>
+          <a:lstStyle/>
+          <a:p>
+            <a:pPr indent="0" marL="0">
+              <a:lnSpc>
+                <a:spcPct val="120000"/>
+              </a:lnSpc>
+              <a:buNone/>
+            </a:pPr>
+            <a:r>
+              <a:rPr lang="en-US" sz="1200" dirty="0">
+                <a:solidFill>
+                  <a:srgbClr val="3A4658"/>
+                </a:solidFill>
+                <a:latin typeface="Calibri" pitchFamily="34" charset="0"/>
+                <a:ea typeface="Calibri" pitchFamily="34" charset="-122"/>
+                <a:cs typeface="Calibri" pitchFamily="34" charset="-120"/>
+              </a:rPr>
+              <a:t>Writes each card the moment it is captured</a:t>
+            </a:r>
+            <a:endParaRPr lang="en-US" sz="1200" dirty="0"/>
+          </a:p>
+        </p:txBody>
+      </p:sp>
+      <p:sp>
+        <p:nvSpPr>
+          <p:cNvPr id="11" name="Shape 8"/>
+          <p:cNvSpPr/>
+          <p:nvPr/>
+        </p:nvSpPr>
+        <p:spPr>
+          <a:xfrm>
+            <a:off x="822960" y="3794760"/>
+            <a:ext cx="91440" cy="91440"/>
+          </a:xfrm>
+          <a:prstGeom prst="ellipse">
+            <a:avLst/>
+          </a:prstGeom>
+          <a:solidFill>
+            <a:srgbClr val="2F6FED"/>
+          </a:solidFill>
+          <a:ln/>
+        </p:spPr>
+      </p:sp>
+      <p:sp>
+        <p:nvSpPr>
+          <p:cNvPr id="12" name="Text 9"/>
+          <p:cNvSpPr txBox="1"/>
+          <p:nvPr/>
+        </p:nvSpPr>
+        <p:spPr>
+          <a:xfrm>
+            <a:off x="1051560" y="3648456"/>
+            <a:ext cx="2743200" cy="640080"/>
+          </a:xfrm>
+          <a:prstGeom prst="rect">
+            <a:avLst/>
+          </a:prstGeom>
+          <a:noFill/>
+          <a:ln/>
+        </p:spPr>
+        <p:txBody>
+          <a:bodyPr wrap="square" lIns="0" tIns="0" rIns="0" bIns="0" rtlCol="0" anchor="ctr"/>
+          <a:lstStyle/>
+          <a:p>
+            <a:pPr indent="0" marL="0">
+              <a:lnSpc>
+                <a:spcPct val="120000"/>
+              </a:lnSpc>
+              <a:buNone/>
+            </a:pPr>
+            <a:r>
+              <a:rPr lang="en-US" sz="1200" dirty="0">
+                <a:solidFill>
+                  <a:srgbClr val="3A4658"/>
+                </a:solidFill>
+                <a:latin typeface="Calibri" pitchFamily="34" charset="0"/>
+                <a:ea typeface="Calibri" pitchFamily="34" charset="-122"/>
+                <a:cs typeface="Calibri" pitchFamily="34" charset="-120"/>
+              </a:rPr>
+              <a:t>No zip step, no waiting at the end</a:t>
+            </a:r>
+            <a:endParaRPr lang="en-US" sz="1200" dirty="0"/>
+          </a:p>
+        </p:txBody>
+      </p:sp>
+      <p:sp>
+        <p:nvSpPr>
+          <p:cNvPr id="13" name="Shape 10"/>
+          <p:cNvSpPr/>
+          <p:nvPr/>
+        </p:nvSpPr>
+        <p:spPr>
+          <a:xfrm>
+            <a:off x="822960" y="4636008"/>
+            <a:ext cx="91440" cy="91440"/>
+          </a:xfrm>
+          <a:prstGeom prst="ellipse">
+            <a:avLst/>
+          </a:prstGeom>
+          <a:solidFill>
+            <a:srgbClr val="2F6FED"/>
+          </a:solidFill>
+          <a:ln/>
+        </p:spPr>
+      </p:sp>
+      <p:sp>
+        <p:nvSpPr>
+          <p:cNvPr id="14" name="Text 11"/>
+          <p:cNvSpPr txBox="1"/>
+          <p:nvPr/>
+        </p:nvSpPr>
+        <p:spPr>
+          <a:xfrm>
+            <a:off x="1051560" y="4489704"/>
+            <a:ext cx="2743200" cy="640080"/>
+          </a:xfrm>
+          <a:prstGeom prst="rect">
+            <a:avLst/>
+          </a:prstGeom>
+          <a:noFill/>
+          <a:ln/>
+        </p:spPr>
+        <p:txBody>
+          <a:bodyPr wrap="square" lIns="0" tIns="0" rIns="0" bIns="0" rtlCol="0" anchor="ctr"/>
+          <a:lstStyle/>
+          <a:p>
+            <a:pPr indent="0" marL="0">
+              <a:lnSpc>
+                <a:spcPct val="120000"/>
+              </a:lnSpc>
+              <a:buNone/>
+            </a:pPr>
+            <a:r>
+              <a:rPr lang="en-US" sz="1200" dirty="0">
+                <a:solidFill>
+                  <a:srgbClr val="3A4658"/>
+                </a:solidFill>
+                <a:latin typeface="Calibri" pitchFamily="34" charset="0"/>
+                <a:ea typeface="Calibri" pitchFamily="34" charset="-122"/>
+                <a:cs typeface="Calibri" pitchFamily="34" charset="-120"/>
+              </a:rPr>
+              <a:t>Chromium-based browsers only</a:t>
+            </a:r>
+            <a:endParaRPr lang="en-US" sz="1200" dirty="0"/>
+          </a:p>
+        </p:txBody>
+      </p:sp>
+      <p:sp>
+        <p:nvSpPr>
+          <p:cNvPr id="15" name="Shape 12"/>
+          <p:cNvSpPr/>
+          <p:nvPr/>
+        </p:nvSpPr>
+        <p:spPr>
+          <a:xfrm>
+            <a:off x="4270248" y="1691640"/>
+            <a:ext cx="3520440" cy="4114800"/>
+          </a:xfrm>
+          <a:prstGeom prst="roundRect">
+            <a:avLst>
+              <a:gd name="adj" fmla="val 2597"/>
+            </a:avLst>
+          </a:prstGeom>
+          <a:solidFill>
+            <a:srgbClr val="F6F8FB"/>
+          </a:solidFill>
+          <a:ln w="12700">
+            <a:solidFill>
+              <a:srgbClr val="E7EBF1"/>
+            </a:solidFill>
+            <a:prstDash val="solid"/>
+          </a:ln>
+        </p:spPr>
+      </p:sp>
+      <p:sp>
+        <p:nvSpPr>
+          <p:cNvPr id="16" name="Shape 13"/>
+          <p:cNvSpPr/>
+          <p:nvPr/>
+        </p:nvSpPr>
+        <p:spPr>
+          <a:xfrm>
+            <a:off x="4544568" y="1920240"/>
+            <a:ext cx="658368" cy="658368"/>
+          </a:xfrm>
+          <a:prstGeom prst="ellipse">
+            <a:avLst/>
+          </a:prstGeom>
+          <a:solidFill>
+            <a:srgbClr val="2F6FED"/>
+          </a:solidFill>
+          <a:ln/>
+        </p:spPr>
+      </p:sp>
+      <p:pic>
+        <p:nvPicPr>
+          <p:cNvPr id="17" name="Image 1" descr="/home/claude/deck/icons/grid.png">    </p:cNvPr>
+          <p:cNvPicPr>
+            <a:picLocks noChangeAspect="1"/>
+          </p:cNvPicPr>
+          <p:nvPr/>
+        </p:nvPicPr>
+        <p:blipFill>
+          <a:blip r:embed="rId2"/>
+          <a:stretch>
+            <a:fillRect/>
+          </a:stretch>
+        </p:blipFill>
+        <p:spPr>
+          <a:xfrm>
+            <a:off x="4709160" y="2084832"/>
+            <a:ext cx="329184" cy="329184"/>
+          </a:xfrm>
+          <a:prstGeom prst="rect">
+            <a:avLst/>
+          </a:prstGeom>
+        </p:spPr>
+      </p:pic>
+      <p:sp>
+        <p:nvSpPr>
+          <p:cNvPr id="18" name="Text 14"/>
+          <p:cNvSpPr txBox="1"/>
+          <p:nvPr/>
+        </p:nvSpPr>
+        <p:spPr>
+          <a:xfrm>
+            <a:off x="5367528" y="1993392"/>
+            <a:ext cx="2194560" cy="274320"/>
+          </a:xfrm>
+          <a:prstGeom prst="rect">
+            <a:avLst/>
+          </a:prstGeom>
+          <a:noFill/>
+          <a:ln/>
+        </p:spPr>
+        <p:txBody>
+          <a:bodyPr wrap="square" lIns="0" tIns="0" rIns="0" bIns="0" rtlCol="0" anchor="ctr"/>
+          <a:lstStyle/>
+          <a:p>
+            <a:pPr indent="0" marL="0">
+              <a:buNone/>
+            </a:pPr>
+            <a:r>
+              <a:rPr lang="en-US" sz="950" spc="100" kern="0" dirty="0">
+                <a:solidFill>
+                  <a:srgbClr val="1C4BB3"/>
+                </a:solidFill>
+                <a:latin typeface="Courier New" pitchFamily="34" charset="0"/>
+                <a:ea typeface="Courier New" pitchFamily="34" charset="-122"/>
+                <a:cs typeface="Courier New" pitchFamily="34" charset="-120"/>
+              </a:rPr>
+              <a:t>MOST PORTABLE</a:t>
+            </a:r>
+            <a:endParaRPr lang="en-US" sz="950" dirty="0"/>
+          </a:p>
+        </p:txBody>
+      </p:sp>
+      <p:sp>
+        <p:nvSpPr>
+          <p:cNvPr id="19" name="Text 15"/>
+          <p:cNvSpPr txBox="1"/>
+          <p:nvPr/>
+        </p:nvSpPr>
+        <p:spPr>
+          <a:xfrm>
+            <a:off x="5367528" y="2212848"/>
+            <a:ext cx="2286000" cy="411480"/>
+          </a:xfrm>
+          <a:prstGeom prst="rect">
+            <a:avLst/>
+          </a:prstGeom>
+          <a:noFill/>
+          <a:ln/>
+        </p:spPr>
+        <p:txBody>
+          <a:bodyPr wrap="square" lIns="0" tIns="0" rIns="0" bIns="0" rtlCol="0" anchor="ctr"/>
+          <a:lstStyle/>
+          <a:p>
+            <a:pPr indent="0" marL="0">
+              <a:buNone/>
+            </a:pPr>
+            <a:r>
+              <a:rPr lang="en-US" sz="1700" b="1" dirty="0">
+                <a:solidFill>
+                  <a:srgbClr val="141C2B"/>
+                </a:solidFill>
+                <a:latin typeface="Calibri" pitchFamily="34" charset="0"/>
+                <a:ea typeface="Calibri" pitchFamily="34" charset="-122"/>
+                <a:cs typeface="Calibri" pitchFamily="34" charset="-120"/>
+              </a:rPr>
+              <a:t>Zip archive</a:t>
+            </a:r>
+            <a:endParaRPr lang="en-US" sz="1700" dirty="0"/>
+          </a:p>
+        </p:txBody>
+      </p:sp>
+      <p:sp>
+        <p:nvSpPr>
+          <p:cNvPr id="20" name="Shape 16"/>
+          <p:cNvSpPr/>
+          <p:nvPr/>
+        </p:nvSpPr>
+        <p:spPr>
+          <a:xfrm>
+            <a:off x="4544568" y="2953512"/>
+            <a:ext cx="91440" cy="91440"/>
+          </a:xfrm>
+          <a:prstGeom prst="ellipse">
+            <a:avLst/>
+          </a:prstGeom>
+          <a:solidFill>
+            <a:srgbClr val="2F6FED"/>
+          </a:solidFill>
+          <a:ln/>
+        </p:spPr>
+      </p:sp>
+      <p:sp>
+        <p:nvSpPr>
+          <p:cNvPr id="21" name="Text 17"/>
+          <p:cNvSpPr txBox="1"/>
+          <p:nvPr/>
+        </p:nvSpPr>
+        <p:spPr>
+          <a:xfrm>
+            <a:off x="4773168" y="2807208"/>
+            <a:ext cx="2743200" cy="640080"/>
+          </a:xfrm>
+          <a:prstGeom prst="rect">
+            <a:avLst/>
+          </a:prstGeom>
+          <a:noFill/>
+          <a:ln/>
+        </p:spPr>
+        <p:txBody>
+          <a:bodyPr wrap="square" lIns="0" tIns="0" rIns="0" bIns="0" rtlCol="0" anchor="ctr"/>
+          <a:lstStyle/>
+          <a:p>
+            <a:pPr indent="0" marL="0">
+              <a:lnSpc>
+                <a:spcPct val="120000"/>
+              </a:lnSpc>
+              <a:buNone/>
+            </a:pPr>
+            <a:r>
+              <a:rPr lang="en-US" sz="1200" dirty="0">
+                <a:solidFill>
+                  <a:srgbClr val="3A4658"/>
+                </a:solidFill>
+                <a:latin typeface="Calibri" pitchFamily="34" charset="0"/>
+                <a:ea typeface="Calibri" pitchFamily="34" charset="-122"/>
+                <a:cs typeface="Calibri" pitchFamily="34" charset="-120"/>
+              </a:rPr>
+              <a:t>PNG, JPEG, or WebP — your choice of format</a:t>
+            </a:r>
+            <a:endParaRPr lang="en-US" sz="1200" dirty="0"/>
+          </a:p>
+        </p:txBody>
+      </p:sp>
+      <p:sp>
+        <p:nvSpPr>
+          <p:cNvPr id="22" name="Shape 18"/>
+          <p:cNvSpPr/>
+          <p:nvPr/>
+        </p:nvSpPr>
+        <p:spPr>
+          <a:xfrm>
+            <a:off x="4544568" y="3794760"/>
+            <a:ext cx="91440" cy="91440"/>
+          </a:xfrm>
+          <a:prstGeom prst="ellipse">
+            <a:avLst/>
+          </a:prstGeom>
+          <a:solidFill>
+            <a:srgbClr val="2F6FED"/>
+          </a:solidFill>
+          <a:ln/>
+        </p:spPr>
+      </p:sp>
+      <p:sp>
+        <p:nvSpPr>
+          <p:cNvPr id="23" name="Text 19"/>
+          <p:cNvSpPr txBox="1"/>
+          <p:nvPr/>
+        </p:nvSpPr>
+        <p:spPr>
+          <a:xfrm>
+            <a:off x="4773168" y="3648456"/>
+            <a:ext cx="2743200" cy="640080"/>
+          </a:xfrm>
+          <a:prstGeom prst="rect">
+            <a:avLst/>
+          </a:prstGeom>
+          <a:noFill/>
+          <a:ln/>
+        </p:spPr>
+        <p:txBody>
+          <a:bodyPr wrap="square" lIns="0" tIns="0" rIns="0" bIns="0" rtlCol="0" anchor="ctr"/>
+          <a:lstStyle/>
+          <a:p>
+            <a:pPr indent="0" marL="0">
+              <a:lnSpc>
+                <a:spcPct val="120000"/>
+              </a:lnSpc>
+              <a:buNone/>
+            </a:pPr>
+            <a:r>
+              <a:rPr lang="en-US" sz="1200" dirty="0">
+                <a:solidFill>
+                  <a:srgbClr val="3A4658"/>
+                </a:solidFill>
+                <a:latin typeface="Calibri" pitchFamily="34" charset="0"/>
+                <a:ea typeface="Calibri" pitchFamily="34" charset="-122"/>
+                <a:cs typeface="Calibri" pitchFamily="34" charset="-120"/>
+              </a:rPr>
+              <a:t>Includes a manifest.md with timestamps</a:t>
+            </a:r>
+            <a:endParaRPr lang="en-US" sz="1200" dirty="0"/>
+          </a:p>
+        </p:txBody>
+      </p:sp>
+      <p:sp>
+        <p:nvSpPr>
+          <p:cNvPr id="24" name="Shape 20"/>
+          <p:cNvSpPr/>
+          <p:nvPr/>
+        </p:nvSpPr>
+        <p:spPr>
+          <a:xfrm>
+            <a:off x="4544568" y="4636008"/>
+            <a:ext cx="91440" cy="91440"/>
+          </a:xfrm>
+          <a:prstGeom prst="ellipse">
+            <a:avLst/>
+          </a:prstGeom>
+          <a:solidFill>
+            <a:srgbClr val="2F6FED"/>
+          </a:solidFill>
+          <a:ln/>
+        </p:spPr>
+      </p:sp>
+      <p:sp>
+        <p:nvSpPr>
+          <p:cNvPr id="25" name="Text 21"/>
+          <p:cNvSpPr txBox="1"/>
+          <p:nvPr/>
+        </p:nvSpPr>
+        <p:spPr>
+          <a:xfrm>
+            <a:off x="4773168" y="4489704"/>
+            <a:ext cx="2743200" cy="640080"/>
+          </a:xfrm>
+          <a:prstGeom prst="rect">
+            <a:avLst/>
+          </a:prstGeom>
+          <a:noFill/>
+          <a:ln/>
+        </p:spPr>
+        <p:txBody>
+          <a:bodyPr wrap="square" lIns="0" tIns="0" rIns="0" bIns="0" rtlCol="0" anchor="ctr"/>
+          <a:lstStyle/>
+          <a:p>
+            <a:pPr indent="0" marL="0">
+              <a:lnSpc>
+                <a:spcPct val="120000"/>
+              </a:lnSpc>
+              <a:buNone/>
+            </a:pPr>
+            <a:r>
+              <a:rPr lang="en-US" sz="1200" dirty="0">
+                <a:solidFill>
+                  <a:srgbClr val="3A4658"/>
+                </a:solidFill>
+                <a:latin typeface="Calibri" pitchFamily="34" charset="0"/>
+                <a:ea typeface="Calibri" pitchFamily="34" charset="-122"/>
+                <a:cs typeface="Calibri" pitchFamily="34" charset="-120"/>
+              </a:rPr>
+              <a:t>Works in every browser</a:t>
+            </a:r>
+            <a:endParaRPr lang="en-US" sz="1200" dirty="0"/>
+          </a:p>
+        </p:txBody>
+      </p:sp>
+      <p:sp>
+        <p:nvSpPr>
+          <p:cNvPr id="26" name="Shape 22"/>
+          <p:cNvSpPr/>
+          <p:nvPr/>
+        </p:nvSpPr>
+        <p:spPr>
+          <a:xfrm>
+            <a:off x="7991856" y="1691640"/>
+            <a:ext cx="3520440" cy="4114800"/>
+          </a:xfrm>
+          <a:prstGeom prst="roundRect">
+            <a:avLst>
+              <a:gd name="adj" fmla="val 2597"/>
+            </a:avLst>
+          </a:prstGeom>
+          <a:solidFill>
+            <a:srgbClr val="F6F8FB"/>
+          </a:solidFill>
+          <a:ln w="12700">
+            <a:solidFill>
+              <a:srgbClr val="E7EBF1"/>
+            </a:solidFill>
+            <a:prstDash val="solid"/>
+          </a:ln>
+        </p:spPr>
+      </p:sp>
+      <p:sp>
+        <p:nvSpPr>
+          <p:cNvPr id="27" name="Shape 23"/>
+          <p:cNvSpPr/>
+          <p:nvPr/>
+        </p:nvSpPr>
+        <p:spPr>
+          <a:xfrm>
+            <a:off x="8266176" y="1920240"/>
+            <a:ext cx="658368" cy="658368"/>
+          </a:xfrm>
+          <a:prstGeom prst="ellipse">
+            <a:avLst/>
+          </a:prstGeom>
+          <a:solidFill>
+            <a:srgbClr val="2F6FED"/>
+          </a:solidFill>
+          <a:ln/>
+        </p:spPr>
+      </p:sp>
+      <p:pic>
+        <p:nvPicPr>
+          <p:cNvPr id="28" name="Image 2" descr="/home/claude/deck/icons/filetext.png">    </p:cNvPr>
+          <p:cNvPicPr>
+            <a:picLocks noChangeAspect="1"/>
+          </p:cNvPicPr>
+          <p:nvPr/>
+        </p:nvPicPr>
+        <p:blipFill>
+          <a:blip r:embed="rId3"/>
+          <a:stretch>
+            <a:fillRect/>
+          </a:stretch>
+        </p:blipFill>
+        <p:spPr>
+          <a:xfrm>
+            <a:off x="8430768" y="2084832"/>
+            <a:ext cx="329184" cy="329184"/>
+          </a:xfrm>
+          <a:prstGeom prst="rect">
+            <a:avLst/>
+          </a:prstGeom>
+        </p:spPr>
+      </p:pic>
+      <p:sp>
+        <p:nvSpPr>
+          <p:cNvPr id="29" name="Text 24"/>
+          <p:cNvSpPr txBox="1"/>
+          <p:nvPr/>
+        </p:nvSpPr>
+        <p:spPr>
+          <a:xfrm>
+            <a:off x="9089136" y="1993392"/>
+            <a:ext cx="2194560" cy="274320"/>
+          </a:xfrm>
+          <a:prstGeom prst="rect">
+            <a:avLst/>
+          </a:prstGeom>
+          <a:noFill/>
+          <a:ln/>
+        </p:spPr>
+        <p:txBody>
+          <a:bodyPr wrap="square" lIns="0" tIns="0" rIns="0" bIns="0" rtlCol="0" anchor="ctr"/>
+          <a:lstStyle/>
+          <a:p>
+            <a:pPr indent="0" marL="0">
+              <a:buNone/>
+            </a:pPr>
+            <a:r>
+              <a:rPr lang="en-US" sz="950" spc="100" kern="0" dirty="0">
+                <a:solidFill>
+                  <a:srgbClr val="1C4BB3"/>
+                </a:solidFill>
+                <a:latin typeface="Courier New" pitchFamily="34" charset="0"/>
+                <a:ea typeface="Courier New" pitchFamily="34" charset="-122"/>
+                <a:cs typeface="Courier New" pitchFamily="34" charset="-120"/>
+              </a:rPr>
+              <a:t>MOST READABLE</a:t>
+            </a:r>
+            <a:endParaRPr lang="en-US" sz="950" dirty="0"/>
+          </a:p>
+        </p:txBody>
+      </p:sp>
+      <p:sp>
+        <p:nvSpPr>
+          <p:cNvPr id="30" name="Text 25"/>
+          <p:cNvSpPr txBox="1"/>
+          <p:nvPr/>
+        </p:nvSpPr>
+        <p:spPr>
+          <a:xfrm>
+            <a:off x="9089136" y="2212848"/>
+            <a:ext cx="2286000" cy="411480"/>
+          </a:xfrm>
+          <a:prstGeom prst="rect">
+            <a:avLst/>
+          </a:prstGeom>
+          <a:noFill/>
+          <a:ln/>
+        </p:spPr>
+        <p:txBody>
+          <a:bodyPr wrap="square" lIns="0" tIns="0" rIns="0" bIns="0" rtlCol="0" anchor="ctr"/>
+          <a:lstStyle/>
+          <a:p>
+            <a:pPr indent="0" marL="0">
+              <a:buNone/>
+            </a:pPr>
+            <a:r>
+              <a:rPr lang="en-US" sz="1700" b="1" dirty="0">
+                <a:solidFill>
+                  <a:srgbClr val="141C2B"/>
+                </a:solidFill>
+                <a:latin typeface="Calibri" pitchFamily="34" charset="0"/>
+                <a:ea typeface="Calibri" pitchFamily="34" charset="-122"/>
+                <a:cs typeface="Calibri" pitchFamily="34" charset="-120"/>
+              </a:rPr>
+              <a:t>Single PDF</a:t>
+            </a:r>
+            <a:endParaRPr lang="en-US" sz="1700" dirty="0"/>
+          </a:p>
+        </p:txBody>
+      </p:sp>
+      <p:sp>
+        <p:nvSpPr>
+          <p:cNvPr id="31" name="Shape 26"/>
+          <p:cNvSpPr/>
+          <p:nvPr/>
+        </p:nvSpPr>
+        <p:spPr>
+          <a:xfrm>
+            <a:off x="8266176" y="2953512"/>
+            <a:ext cx="91440" cy="91440"/>
+          </a:xfrm>
+          <a:prstGeom prst="ellipse">
+            <a:avLst/>
+          </a:prstGeom>
+          <a:solidFill>
+            <a:srgbClr val="2F6FED"/>
+          </a:solidFill>
+          <a:ln/>
+        </p:spPr>
+      </p:sp>
+      <p:sp>
+        <p:nvSpPr>
+          <p:cNvPr id="32" name="Text 27"/>
+          <p:cNvSpPr txBox="1"/>
+          <p:nvPr/>
+        </p:nvSpPr>
+        <p:spPr>
+          <a:xfrm>
+            <a:off x="8494776" y="2807208"/>
+            <a:ext cx="2743200" cy="640080"/>
+          </a:xfrm>
+          <a:prstGeom prst="rect">
+            <a:avLst/>
+          </a:prstGeom>
+          <a:noFill/>
+          <a:ln/>
+        </p:spPr>
+        <p:txBody>
+          <a:bodyPr wrap="square" lIns="0" tIns="0" rIns="0" bIns="0" rtlCol="0" anchor="ctr"/>
+          <a:lstStyle/>
+          <a:p>
+            <a:pPr indent="0" marL="0">
+              <a:lnSpc>
+                <a:spcPct val="120000"/>
+              </a:lnSpc>
+              <a:buNone/>
+            </a:pPr>
+            <a:r>
+              <a:rPr lang="en-US" sz="1200" dirty="0">
+                <a:solidFill>
+                  <a:srgbClr val="3A4658"/>
+                </a:solidFill>
+                <a:latin typeface="Calibri" pitchFamily="34" charset="0"/>
+                <a:ea typeface="Calibri" pitchFamily="34" charset="-122"/>
+                <a:cs typeface="Calibri" pitchFamily="34" charset="-120"/>
+              </a:rPr>
+              <a:t>One page per card, captioned and timestamped</a:t>
+            </a:r>
+            <a:endParaRPr lang="en-US" sz="1200" dirty="0"/>
+          </a:p>
+        </p:txBody>
+      </p:sp>
+      <p:sp>
+        <p:nvSpPr>
+          <p:cNvPr id="33" name="Shape 28"/>
+          <p:cNvSpPr/>
+          <p:nvPr/>
+        </p:nvSpPr>
+        <p:spPr>
+          <a:xfrm>
+            <a:off x="8266176" y="3794760"/>
+            <a:ext cx="91440" cy="91440"/>
+          </a:xfrm>
+          <a:prstGeom prst="ellipse">
+            <a:avLst/>
+          </a:prstGeom>
+          <a:solidFill>
+            <a:srgbClr val="2F6FED"/>
+          </a:solidFill>
+          <a:ln/>
+        </p:spPr>
+      </p:sp>
+      <p:sp>
+        <p:nvSpPr>
+          <p:cNvPr id="34" name="Text 29"/>
+          <p:cNvSpPr txBox="1"/>
+          <p:nvPr/>
+        </p:nvSpPr>
+        <p:spPr>
+          <a:xfrm>
+            <a:off x="8494776" y="3648456"/>
+            <a:ext cx="2743200" cy="640080"/>
+          </a:xfrm>
+          <a:prstGeom prst="rect">
+            <a:avLst/>
+          </a:prstGeom>
+          <a:noFill/>
+          <a:ln/>
+        </p:spPr>
+        <p:txBody>
+          <a:bodyPr wrap="square" lIns="0" tIns="0" rIns="0" bIns="0" rtlCol="0" anchor="ctr"/>
+          <a:lstStyle/>
+          <a:p>
+            <a:pPr indent="0" marL="0">
+              <a:lnSpc>
+                <a:spcPct val="120000"/>
+              </a:lnSpc>
+              <a:buNone/>
+            </a:pPr>
+            <a:r>
+              <a:rPr lang="en-US" sz="1200" dirty="0">
+                <a:solidFill>
+                  <a:srgbClr val="3A4658"/>
+                </a:solidFill>
+                <a:latin typeface="Calibri" pitchFamily="34" charset="0"/>
+                <a:ea typeface="Calibri" pitchFamily="34" charset="-122"/>
+                <a:cs typeface="Calibri" pitchFamily="34" charset="-120"/>
+              </a:rPr>
+              <a:t>OCR text included beneath each image</a:t>
+            </a:r>
+            <a:endParaRPr lang="en-US" sz="1200" dirty="0"/>
+          </a:p>
+        </p:txBody>
+      </p:sp>
+      <p:sp>
+        <p:nvSpPr>
+          <p:cNvPr id="35" name="Shape 30"/>
+          <p:cNvSpPr/>
+          <p:nvPr/>
+        </p:nvSpPr>
+        <p:spPr>
+          <a:xfrm>
+            <a:off x="8266176" y="4636008"/>
+            <a:ext cx="91440" cy="91440"/>
+          </a:xfrm>
+          <a:prstGeom prst="ellipse">
+            <a:avLst/>
+          </a:prstGeom>
+          <a:solidFill>
+            <a:srgbClr val="2F6FED"/>
+          </a:solidFill>
+          <a:ln/>
+        </p:spPr>
+      </p:sp>
+      <p:sp>
+        <p:nvSpPr>
+          <p:cNvPr id="36" name="Text 31"/>
+          <p:cNvSpPr txBox="1"/>
+          <p:nvPr/>
+        </p:nvSpPr>
+        <p:spPr>
+          <a:xfrm>
+            <a:off x="8494776" y="4489704"/>
+            <a:ext cx="2743200" cy="640080"/>
+          </a:xfrm>
+          <a:prstGeom prst="rect">
+            <a:avLst/>
+          </a:prstGeom>
+          <a:noFill/>
+          <a:ln/>
+        </p:spPr>
+        <p:txBody>
+          <a:bodyPr wrap="square" lIns="0" tIns="0" rIns="0" bIns="0" rtlCol="0" anchor="ctr"/>
+          <a:lstStyle/>
+          <a:p>
+            <a:pPr indent="0" marL="0">
+              <a:lnSpc>
+                <a:spcPct val="120000"/>
+              </a:lnSpc>
+              <a:buNone/>
+            </a:pPr>
+            <a:r>
+              <a:rPr lang="en-US" sz="1200" dirty="0">
+                <a:solidFill>
+                  <a:srgbClr val="3A4658"/>
+                </a:solidFill>
+                <a:latin typeface="Calibri" pitchFamily="34" charset="0"/>
+                <a:ea typeface="Calibri" pitchFamily="34" charset="-122"/>
+                <a:cs typeface="Calibri" pitchFamily="34" charset="-120"/>
+              </a:rPr>
+              <a:t>Optional uniform page size, never cropped</a:t>
+            </a:r>
+            <a:endParaRPr lang="en-US" sz="1200" dirty="0"/>
+          </a:p>
+        </p:txBody>
+      </p:sp>
+      <p:sp>
+        <p:nvSpPr>
+          <p:cNvPr id="37" name="Text 32"/>
+          <p:cNvSpPr txBox="1"/>
+          <p:nvPr/>
+        </p:nvSpPr>
+        <p:spPr>
+          <a:xfrm>
+            <a:off x="11475720" y="6446520"/>
+            <a:ext cx="548640" cy="274320"/>
+          </a:xfrm>
+          <a:prstGeom prst="rect">
+            <a:avLst/>
+          </a:prstGeom>
+          <a:noFill/>
+          <a:ln/>
+        </p:spPr>
+        <p:txBody>
+          <a:bodyPr wrap="square" lIns="0" tIns="0" rIns="0" bIns="0" rtlCol="0" anchor="ctr"/>
+          <a:lstStyle/>
+          <a:p>
+            <a:pPr algn="r" indent="0" marL="0">
+              <a:buNone/>
+            </a:pPr>
+            <a:r>
+              <a:rPr lang="en-US" sz="1000" dirty="0">
+                <a:solidFill>
+                  <a:srgbClr val="8FA0B8"/>
+                </a:solidFill>
+                <a:latin typeface="Courier New" pitchFamily="34" charset="0"/>
+                <a:ea typeface="Courier New" pitchFamily="34" charset="-122"/>
+                <a:cs typeface="Courier New" pitchFamily="34" charset="-120"/>
+              </a:rPr>
+              <a:t>07</a:t>
+            </a:r>
+            <a:endParaRPr lang="en-US" sz="1000" dirty="0"/>
+          </a:p>
+        </p:txBody>
+      </p:sp>
+    </p:spTree>
+  </p:cSld>
+  <p:clrMapOvr>
+    <a:masterClrMapping/>
+  </p:clrMapOvr>
+</p:sld>
+</file>
+
+<file path=ppt/slides/slide8.xml><?xml version="1.0" encoding="utf-8"?>
+<p:sld xmlns:a="http://schemas.openxmlformats.org/drawingml/2006/main" xmlns:r="http://schemas.openxmlformats.org/officeDocument/2006/relationships" xmlns:p="http://schemas.openxmlformats.org/presentationml/2006/main">
+  <p:cSld name="Slide 8">
     <p:bg>
       <p:bgPr>
         <a:solidFill>
@@ -7592,12 +8835,12 @@
         </p:nvSpPr>
         <p:spPr>
           <a:xfrm>
-            <a:off x="548640" y="2606040"/>
-            <a:ext cx="5669280" cy="512064"/>
+            <a:off x="548640" y="2788920"/>
+            <a:ext cx="5669280" cy="420624"/>
           </a:xfrm>
           <a:prstGeom prst="roundRect">
             <a:avLst>
-              <a:gd name="adj" fmla="val 10714"/>
+              <a:gd name="adj" fmla="val 13043"/>
             </a:avLst>
           </a:prstGeom>
           <a:solidFill>
@@ -7619,24 +8862,24 @@
         </p:nvSpPr>
         <p:spPr>
           <a:xfrm>
-            <a:off x="731520" y="2651760"/>
-            <a:ext cx="2103120" cy="420624"/>
-          </a:xfrm>
-          <a:prstGeom prst="rect">
-            <a:avLst/>
-          </a:prstGeom>
-          <a:noFill/>
-          <a:ln/>
-        </p:spPr>
-        <p:txBody>
-          <a:bodyPr wrap="square" lIns="0" tIns="0" rIns="0" bIns="0" rtlCol="0" anchor="ctr"/>
-          <a:lstStyle/>
-          <a:p>
-            <a:pPr indent="0" marL="0">
-              <a:buNone/>
-            </a:pPr>
-            <a:r>
-              <a:rPr lang="en-US" sz="1100" b="1" dirty="0">
+            <a:off x="731520" y="2816352"/>
+            <a:ext cx="2103120" cy="365760"/>
+          </a:xfrm>
+          <a:prstGeom prst="rect">
+            <a:avLst/>
+          </a:prstGeom>
+          <a:noFill/>
+          <a:ln/>
+        </p:spPr>
+        <p:txBody>
+          <a:bodyPr wrap="square" lIns="0" tIns="0" rIns="0" bIns="0" rtlCol="0" anchor="ctr"/>
+          <a:lstStyle/>
+          <a:p>
+            <a:pPr indent="0" marL="0">
+              <a:buNone/>
+            </a:pPr>
+            <a:r>
+              <a:rPr lang="en-US" sz="1050" b="1" dirty="0">
                 <a:solidFill>
                   <a:srgbClr val="8FD8FF"/>
                 </a:solidFill>
@@ -7646,7 +8889,7 @@
               </a:rPr>
               <a:t>Canvas API</a:t>
             </a:r>
-            <a:endParaRPr lang="en-US" sz="1100" dirty="0"/>
+            <a:endParaRPr lang="en-US" sz="1050" dirty="0"/>
           </a:p>
         </p:txBody>
       </p:sp>
@@ -7658,24 +8901,24 @@
         </p:nvSpPr>
         <p:spPr>
           <a:xfrm>
-            <a:off x="2880360" y="2651760"/>
-            <a:ext cx="3246120" cy="420624"/>
-          </a:xfrm>
-          <a:prstGeom prst="rect">
-            <a:avLst/>
-          </a:prstGeom>
-          <a:noFill/>
-          <a:ln/>
-        </p:spPr>
-        <p:txBody>
-          <a:bodyPr wrap="square" lIns="0" tIns="0" rIns="0" bIns="0" rtlCol="0" anchor="ctr"/>
-          <a:lstStyle/>
-          <a:p>
-            <a:pPr indent="0" marL="0">
-              <a:buNone/>
-            </a:pPr>
-            <a:r>
-              <a:rPr lang="en-US" sz="1050" dirty="0">
+            <a:off x="2880360" y="2816352"/>
+            <a:ext cx="3246120" cy="365760"/>
+          </a:xfrm>
+          <a:prstGeom prst="rect">
+            <a:avLst/>
+          </a:prstGeom>
+          <a:noFill/>
+          <a:ln/>
+        </p:spPr>
+        <p:txBody>
+          <a:bodyPr wrap="square" lIns="0" tIns="0" rIns="0" bIns="0" rtlCol="0" anchor="ctr"/>
+          <a:lstStyle/>
+          <a:p>
+            <a:pPr indent="0" marL="0">
+              <a:buNone/>
+            </a:pPr>
+            <a:r>
+              <a:rPr lang="en-US" sz="1000" dirty="0">
                 <a:solidFill>
                   <a:srgbClr val="E8F0FA"/>
                 </a:solidFill>
@@ -7685,7 +8928,7 @@
               </a:rPr>
               <a:t>Frame sampling &amp; pixel-diff comparison</a:t>
             </a:r>
-            <a:endParaRPr lang="en-US" sz="1050" dirty="0"/>
+            <a:endParaRPr lang="en-US" sz="1000" dirty="0"/>
           </a:p>
         </p:txBody>
       </p:sp>
@@ -7697,12 +8940,12 @@
         </p:nvSpPr>
         <p:spPr>
           <a:xfrm>
-            <a:off x="548640" y="3218688"/>
-            <a:ext cx="5669280" cy="512064"/>
+            <a:off x="548640" y="3300984"/>
+            <a:ext cx="5669280" cy="420624"/>
           </a:xfrm>
           <a:prstGeom prst="roundRect">
             <a:avLst>
-              <a:gd name="adj" fmla="val 10714"/>
+              <a:gd name="adj" fmla="val 13043"/>
             </a:avLst>
           </a:prstGeom>
           <a:solidFill>
@@ -7724,24 +8967,24 @@
         </p:nvSpPr>
         <p:spPr>
           <a:xfrm>
-            <a:off x="731520" y="3264408"/>
-            <a:ext cx="2103120" cy="420624"/>
-          </a:xfrm>
-          <a:prstGeom prst="rect">
-            <a:avLst/>
-          </a:prstGeom>
-          <a:noFill/>
-          <a:ln/>
-        </p:spPr>
-        <p:txBody>
-          <a:bodyPr wrap="square" lIns="0" tIns="0" rIns="0" bIns="0" rtlCol="0" anchor="ctr"/>
-          <a:lstStyle/>
-          <a:p>
-            <a:pPr indent="0" marL="0">
-              <a:buNone/>
-            </a:pPr>
-            <a:r>
-              <a:rPr lang="en-US" sz="1100" b="1" dirty="0">
+            <a:off x="731520" y="3328416"/>
+            <a:ext cx="2103120" cy="365760"/>
+          </a:xfrm>
+          <a:prstGeom prst="rect">
+            <a:avLst/>
+          </a:prstGeom>
+          <a:noFill/>
+          <a:ln/>
+        </p:spPr>
+        <p:txBody>
+          <a:bodyPr wrap="square" lIns="0" tIns="0" rIns="0" bIns="0" rtlCol="0" anchor="ctr"/>
+          <a:lstStyle/>
+          <a:p>
+            <a:pPr indent="0" marL="0">
+              <a:buNone/>
+            </a:pPr>
+            <a:r>
+              <a:rPr lang="en-US" sz="1050" b="1" dirty="0">
                 <a:solidFill>
                   <a:srgbClr val="8FD8FF"/>
                 </a:solidFill>
@@ -7751,7 +8994,7 @@
               </a:rPr>
               <a:t>File System Access API</a:t>
             </a:r>
-            <a:endParaRPr lang="en-US" sz="1100" dirty="0"/>
+            <a:endParaRPr lang="en-US" sz="1050" dirty="0"/>
           </a:p>
         </p:txBody>
       </p:sp>
@@ -7763,24 +9006,24 @@
         </p:nvSpPr>
         <p:spPr>
           <a:xfrm>
-            <a:off x="2880360" y="3264408"/>
-            <a:ext cx="3246120" cy="420624"/>
-          </a:xfrm>
-          <a:prstGeom prst="rect">
-            <a:avLst/>
-          </a:prstGeom>
-          <a:noFill/>
-          <a:ln/>
-        </p:spPr>
-        <p:txBody>
-          <a:bodyPr wrap="square" lIns="0" tIns="0" rIns="0" bIns="0" rtlCol="0" anchor="ctr"/>
-          <a:lstStyle/>
-          <a:p>
-            <a:pPr indent="0" marL="0">
-              <a:buNone/>
-            </a:pPr>
-            <a:r>
-              <a:rPr lang="en-US" sz="1050" dirty="0">
+            <a:off x="2880360" y="3328416"/>
+            <a:ext cx="3246120" cy="365760"/>
+          </a:xfrm>
+          <a:prstGeom prst="rect">
+            <a:avLst/>
+          </a:prstGeom>
+          <a:noFill/>
+          <a:ln/>
+        </p:spPr>
+        <p:txBody>
+          <a:bodyPr wrap="square" lIns="0" tIns="0" rIns="0" bIns="0" rtlCol="0" anchor="ctr"/>
+          <a:lstStyle/>
+          <a:p>
+            <a:pPr indent="0" marL="0">
+              <a:buNone/>
+            </a:pPr>
+            <a:r>
+              <a:rPr lang="en-US" sz="1000" dirty="0">
                 <a:solidFill>
                   <a:srgbClr val="E8F0FA"/>
                 </a:solidFill>
@@ -7790,7 +9033,7 @@
               </a:rPr>
               <a:t>Direct-to-folder writes</a:t>
             </a:r>
-            <a:endParaRPr lang="en-US" sz="1050" dirty="0"/>
+            <a:endParaRPr lang="en-US" sz="1000" dirty="0"/>
           </a:p>
         </p:txBody>
       </p:sp>
@@ -7802,12 +9045,12 @@
         </p:nvSpPr>
         <p:spPr>
           <a:xfrm>
-            <a:off x="548640" y="3831336"/>
-            <a:ext cx="5669280" cy="512064"/>
+            <a:off x="548640" y="3813048"/>
+            <a:ext cx="5669280" cy="420624"/>
           </a:xfrm>
           <a:prstGeom prst="roundRect">
             <a:avLst>
-              <a:gd name="adj" fmla="val 10714"/>
+              <a:gd name="adj" fmla="val 13043"/>
             </a:avLst>
           </a:prstGeom>
           <a:solidFill>
@@ -7829,24 +9072,24 @@
         </p:nvSpPr>
         <p:spPr>
           <a:xfrm>
-            <a:off x="731520" y="3877056"/>
-            <a:ext cx="2103120" cy="420624"/>
-          </a:xfrm>
-          <a:prstGeom prst="rect">
-            <a:avLst/>
-          </a:prstGeom>
-          <a:noFill/>
-          <a:ln/>
-        </p:spPr>
-        <p:txBody>
-          <a:bodyPr wrap="square" lIns="0" tIns="0" rIns="0" bIns="0" rtlCol="0" anchor="ctr"/>
-          <a:lstStyle/>
-          <a:p>
-            <a:pPr indent="0" marL="0">
-              <a:buNone/>
-            </a:pPr>
-            <a:r>
-              <a:rPr lang="en-US" sz="1100" b="1" dirty="0">
+            <a:off x="731520" y="3840480"/>
+            <a:ext cx="2103120" cy="365760"/>
+          </a:xfrm>
+          <a:prstGeom prst="rect">
+            <a:avLst/>
+          </a:prstGeom>
+          <a:noFill/>
+          <a:ln/>
+        </p:spPr>
+        <p:txBody>
+          <a:bodyPr wrap="square" lIns="0" tIns="0" rIns="0" bIns="0" rtlCol="0" anchor="ctr"/>
+          <a:lstStyle/>
+          <a:p>
+            <a:pPr indent="0" marL="0">
+              <a:buNone/>
+            </a:pPr>
+            <a:r>
+              <a:rPr lang="en-US" sz="1050" b="1" dirty="0">
                 <a:solidFill>
                   <a:srgbClr val="8FD8FF"/>
                 </a:solidFill>
@@ -7856,7 +9099,7 @@
               </a:rPr>
               <a:t>IndexedDB</a:t>
             </a:r>
-            <a:endParaRPr lang="en-US" sz="1100" dirty="0"/>
+            <a:endParaRPr lang="en-US" sz="1050" dirty="0"/>
           </a:p>
         </p:txBody>
       </p:sp>
@@ -7868,24 +9111,24 @@
         </p:nvSpPr>
         <p:spPr>
           <a:xfrm>
-            <a:off x="2880360" y="3877056"/>
-            <a:ext cx="3246120" cy="420624"/>
-          </a:xfrm>
-          <a:prstGeom prst="rect">
-            <a:avLst/>
-          </a:prstGeom>
-          <a:noFill/>
-          <a:ln/>
-        </p:spPr>
-        <p:txBody>
-          <a:bodyPr wrap="square" lIns="0" tIns="0" rIns="0" bIns="0" rtlCol="0" anchor="ctr"/>
-          <a:lstStyle/>
-          <a:p>
-            <a:pPr indent="0" marL="0">
-              <a:buNone/>
-            </a:pPr>
-            <a:r>
-              <a:rPr lang="en-US" sz="1050" dirty="0">
+            <a:off x="2880360" y="3840480"/>
+            <a:ext cx="3246120" cy="365760"/>
+          </a:xfrm>
+          <a:prstGeom prst="rect">
+            <a:avLst/>
+          </a:prstGeom>
+          <a:noFill/>
+          <a:ln/>
+        </p:spPr>
+        <p:txBody>
+          <a:bodyPr wrap="square" lIns="0" tIns="0" rIns="0" bIns="0" rtlCol="0" anchor="ctr"/>
+          <a:lstStyle/>
+          <a:p>
+            <a:pPr indent="0" marL="0">
+              <a:buNone/>
+            </a:pPr>
+            <a:r>
+              <a:rPr lang="en-US" sz="1000" dirty="0">
                 <a:solidFill>
                   <a:srgbClr val="E8F0FA"/>
                 </a:solidFill>
@@ -7895,7 +9138,7 @@
               </a:rPr>
               <a:t>Local session persistence</a:t>
             </a:r>
-            <a:endParaRPr lang="en-US" sz="1050" dirty="0"/>
+            <a:endParaRPr lang="en-US" sz="1000" dirty="0"/>
           </a:p>
         </p:txBody>
       </p:sp>
@@ -7907,12 +9150,12 @@
         </p:nvSpPr>
         <p:spPr>
           <a:xfrm>
-            <a:off x="548640" y="4443984"/>
-            <a:ext cx="5669280" cy="512064"/>
+            <a:off x="548640" y="4325112"/>
+            <a:ext cx="5669280" cy="420624"/>
           </a:xfrm>
           <a:prstGeom prst="roundRect">
             <a:avLst>
-              <a:gd name="adj" fmla="val 10714"/>
+              <a:gd name="adj" fmla="val 13043"/>
             </a:avLst>
           </a:prstGeom>
           <a:solidFill>
@@ -7934,24 +9177,24 @@
         </p:nvSpPr>
         <p:spPr>
           <a:xfrm>
-            <a:off x="731520" y="4489704"/>
-            <a:ext cx="2103120" cy="420624"/>
-          </a:xfrm>
-          <a:prstGeom prst="rect">
-            <a:avLst/>
-          </a:prstGeom>
-          <a:noFill/>
-          <a:ln/>
-        </p:spPr>
-        <p:txBody>
-          <a:bodyPr wrap="square" lIns="0" tIns="0" rIns="0" bIns="0" rtlCol="0" anchor="ctr"/>
-          <a:lstStyle/>
-          <a:p>
-            <a:pPr indent="0" marL="0">
-              <a:buNone/>
-            </a:pPr>
-            <a:r>
-              <a:rPr lang="en-US" sz="1100" b="1" dirty="0">
+            <a:off x="731520" y="4352544"/>
+            <a:ext cx="2103120" cy="365760"/>
+          </a:xfrm>
+          <a:prstGeom prst="rect">
+            <a:avLst/>
+          </a:prstGeom>
+          <a:noFill/>
+          <a:ln/>
+        </p:spPr>
+        <p:txBody>
+          <a:bodyPr wrap="square" lIns="0" tIns="0" rIns="0" bIns="0" rtlCol="0" anchor="ctr"/>
+          <a:lstStyle/>
+          <a:p>
+            <a:pPr indent="0" marL="0">
+              <a:buNone/>
+            </a:pPr>
+            <a:r>
+              <a:rPr lang="en-US" sz="1050" b="1" dirty="0">
                 <a:solidFill>
                   <a:srgbClr val="8FD8FF"/>
                 </a:solidFill>
@@ -7959,9 +9202,9 @@
                 <a:ea typeface="Courier New" pitchFamily="34" charset="-122"/>
                 <a:cs typeface="Courier New" pitchFamily="34" charset="-120"/>
               </a:rPr>
-              <a:t>Tesseract.js</a:t>
-            </a:r>
-            <a:endParaRPr lang="en-US" sz="1100" dirty="0"/>
+              <a:t>MediaRecorder API</a:t>
+            </a:r>
+            <a:endParaRPr lang="en-US" sz="1050" dirty="0"/>
           </a:p>
         </p:txBody>
       </p:sp>
@@ -7973,24 +9216,24 @@
         </p:nvSpPr>
         <p:spPr>
           <a:xfrm>
-            <a:off x="2880360" y="4489704"/>
-            <a:ext cx="3246120" cy="420624"/>
-          </a:xfrm>
-          <a:prstGeom prst="rect">
-            <a:avLst/>
-          </a:prstGeom>
-          <a:noFill/>
-          <a:ln/>
-        </p:spPr>
-        <p:txBody>
-          <a:bodyPr wrap="square" lIns="0" tIns="0" rIns="0" bIns="0" rtlCol="0" anchor="ctr"/>
-          <a:lstStyle/>
-          <a:p>
-            <a:pPr indent="0" marL="0">
-              <a:buNone/>
-            </a:pPr>
-            <a:r>
-              <a:rPr lang="en-US" sz="1050" dirty="0">
+            <a:off x="2880360" y="4352544"/>
+            <a:ext cx="3246120" cy="365760"/>
+          </a:xfrm>
+          <a:prstGeom prst="rect">
+            <a:avLst/>
+          </a:prstGeom>
+          <a:noFill/>
+          <a:ln/>
+        </p:spPr>
+        <p:txBody>
+          <a:bodyPr wrap="square" lIns="0" tIns="0" rIns="0" bIns="0" rtlCol="0" anchor="ctr"/>
+          <a:lstStyle/>
+          <a:p>
+            <a:pPr indent="0" marL="0">
+              <a:buNone/>
+            </a:pPr>
+            <a:r>
+              <a:rPr lang="en-US" sz="1000" dirty="0">
                 <a:solidFill>
                   <a:srgbClr val="E8F0FA"/>
                 </a:solidFill>
@@ -7998,9 +9241,9 @@
                 <a:ea typeface="Calibri" pitchFamily="34" charset="-122"/>
                 <a:cs typeface="Calibri" pitchFamily="34" charset="-120"/>
               </a:rPr>
-              <a:t>On-device OCR</a:t>
-            </a:r>
-            <a:endParaRPr lang="en-US" sz="1050" dirty="0"/>
+              <a:t>Native in-browser clip export</a:t>
+            </a:r>
+            <a:endParaRPr lang="en-US" sz="1000" dirty="0"/>
           </a:p>
         </p:txBody>
       </p:sp>
@@ -8012,12 +9255,12 @@
         </p:nvSpPr>
         <p:spPr>
           <a:xfrm>
-            <a:off x="548640" y="5056632"/>
-            <a:ext cx="5669280" cy="512064"/>
+            <a:off x="548640" y="4837176"/>
+            <a:ext cx="5669280" cy="420624"/>
           </a:xfrm>
           <a:prstGeom prst="roundRect">
             <a:avLst>
-              <a:gd name="adj" fmla="val 10714"/>
+              <a:gd name="adj" fmla="val 13043"/>
             </a:avLst>
           </a:prstGeom>
           <a:solidFill>
@@ -8039,24 +9282,24 @@
         </p:nvSpPr>
         <p:spPr>
           <a:xfrm>
-            <a:off x="731520" y="5102352"/>
-            <a:ext cx="2103120" cy="420624"/>
-          </a:xfrm>
-          <a:prstGeom prst="rect">
-            <a:avLst/>
-          </a:prstGeom>
-          <a:noFill/>
-          <a:ln/>
-        </p:spPr>
-        <p:txBody>
-          <a:bodyPr wrap="square" lIns="0" tIns="0" rIns="0" bIns="0" rtlCol="0" anchor="ctr"/>
-          <a:lstStyle/>
-          <a:p>
-            <a:pPr indent="0" marL="0">
-              <a:buNone/>
-            </a:pPr>
-            <a:r>
-              <a:rPr lang="en-US" sz="1100" b="1" dirty="0">
+            <a:off x="731520" y="4864608"/>
+            <a:ext cx="2103120" cy="365760"/>
+          </a:xfrm>
+          <a:prstGeom prst="rect">
+            <a:avLst/>
+          </a:prstGeom>
+          <a:noFill/>
+          <a:ln/>
+        </p:spPr>
+        <p:txBody>
+          <a:bodyPr wrap="square" lIns="0" tIns="0" rIns="0" bIns="0" rtlCol="0" anchor="ctr"/>
+          <a:lstStyle/>
+          <a:p>
+            <a:pPr indent="0" marL="0">
+              <a:buNone/>
+            </a:pPr>
+            <a:r>
+              <a:rPr lang="en-US" sz="1050" b="1" dirty="0">
                 <a:solidFill>
                   <a:srgbClr val="8FD8FF"/>
                 </a:solidFill>
@@ -8064,9 +9307,9 @@
                 <a:ea typeface="Courier New" pitchFamily="34" charset="-122"/>
                 <a:cs typeface="Courier New" pitchFamily="34" charset="-120"/>
               </a:rPr>
-              <a:t>JSZip</a:t>
-            </a:r>
-            <a:endParaRPr lang="en-US" sz="1100" dirty="0"/>
+              <a:t>Tesseract.js</a:t>
+            </a:r>
+            <a:endParaRPr lang="en-US" sz="1050" dirty="0"/>
           </a:p>
         </p:txBody>
       </p:sp>
@@ -8078,24 +9321,24 @@
         </p:nvSpPr>
         <p:spPr>
           <a:xfrm>
-            <a:off x="2880360" y="5102352"/>
-            <a:ext cx="3246120" cy="420624"/>
-          </a:xfrm>
-          <a:prstGeom prst="rect">
-            <a:avLst/>
-          </a:prstGeom>
-          <a:noFill/>
-          <a:ln/>
-        </p:spPr>
-        <p:txBody>
-          <a:bodyPr wrap="square" lIns="0" tIns="0" rIns="0" bIns="0" rtlCol="0" anchor="ctr"/>
-          <a:lstStyle/>
-          <a:p>
-            <a:pPr indent="0" marL="0">
-              <a:buNone/>
-            </a:pPr>
-            <a:r>
-              <a:rPr lang="en-US" sz="1050" dirty="0">
+            <a:off x="2880360" y="4864608"/>
+            <a:ext cx="3246120" cy="365760"/>
+          </a:xfrm>
+          <a:prstGeom prst="rect">
+            <a:avLst/>
+          </a:prstGeom>
+          <a:noFill/>
+          <a:ln/>
+        </p:spPr>
+        <p:txBody>
+          <a:bodyPr wrap="square" lIns="0" tIns="0" rIns="0" bIns="0" rtlCol="0" anchor="ctr"/>
+          <a:lstStyle/>
+          <a:p>
+            <a:pPr indent="0" marL="0">
+              <a:buNone/>
+            </a:pPr>
+            <a:r>
+              <a:rPr lang="en-US" sz="1000" dirty="0">
                 <a:solidFill>
                   <a:srgbClr val="E8F0FA"/>
                 </a:solidFill>
@@ -8103,9 +9346,9 @@
                 <a:ea typeface="Calibri" pitchFamily="34" charset="-122"/>
                 <a:cs typeface="Calibri" pitchFamily="34" charset="-120"/>
               </a:rPr>
-              <a:t>Zip archive export</a:t>
-            </a:r>
-            <a:endParaRPr lang="en-US" sz="1050" dirty="0"/>
+              <a:t>On-device OCR</a:t>
+            </a:r>
+            <a:endParaRPr lang="en-US" sz="1000" dirty="0"/>
           </a:p>
         </p:txBody>
       </p:sp>
@@ -8117,12 +9360,12 @@
         </p:nvSpPr>
         <p:spPr>
           <a:xfrm>
-            <a:off x="548640" y="5669280"/>
-            <a:ext cx="5669280" cy="512064"/>
+            <a:off x="548640" y="5349240"/>
+            <a:ext cx="5669280" cy="420624"/>
           </a:xfrm>
           <a:prstGeom prst="roundRect">
             <a:avLst>
-              <a:gd name="adj" fmla="val 10714"/>
+              <a:gd name="adj" fmla="val 13043"/>
             </a:avLst>
           </a:prstGeom>
           <a:solidFill>
@@ -8144,24 +9387,24 @@
         </p:nvSpPr>
         <p:spPr>
           <a:xfrm>
-            <a:off x="731520" y="5715000"/>
-            <a:ext cx="2103120" cy="420624"/>
-          </a:xfrm>
-          <a:prstGeom prst="rect">
-            <a:avLst/>
-          </a:prstGeom>
-          <a:noFill/>
-          <a:ln/>
-        </p:spPr>
-        <p:txBody>
-          <a:bodyPr wrap="square" lIns="0" tIns="0" rIns="0" bIns="0" rtlCol="0" anchor="ctr"/>
-          <a:lstStyle/>
-          <a:p>
-            <a:pPr indent="0" marL="0">
-              <a:buNone/>
-            </a:pPr>
-            <a:r>
-              <a:rPr lang="en-US" sz="1100" b="1" dirty="0">
+            <a:off x="731520" y="5376672"/>
+            <a:ext cx="2103120" cy="365760"/>
+          </a:xfrm>
+          <a:prstGeom prst="rect">
+            <a:avLst/>
+          </a:prstGeom>
+          <a:noFill/>
+          <a:ln/>
+        </p:spPr>
+        <p:txBody>
+          <a:bodyPr wrap="square" lIns="0" tIns="0" rIns="0" bIns="0" rtlCol="0" anchor="ctr"/>
+          <a:lstStyle/>
+          <a:p>
+            <a:pPr indent="0" marL="0">
+              <a:buNone/>
+            </a:pPr>
+            <a:r>
+              <a:rPr lang="en-US" sz="1050" b="1" dirty="0">
                 <a:solidFill>
                   <a:srgbClr val="8FD8FF"/>
                 </a:solidFill>
@@ -8169,9 +9412,9 @@
                 <a:ea typeface="Courier New" pitchFamily="34" charset="-122"/>
                 <a:cs typeface="Courier New" pitchFamily="34" charset="-120"/>
               </a:rPr>
-              <a:t>jsPDF</a:t>
-            </a:r>
-            <a:endParaRPr lang="en-US" sz="1100" dirty="0"/>
+              <a:t>JSZip</a:t>
+            </a:r>
+            <a:endParaRPr lang="en-US" sz="1050" dirty="0"/>
           </a:p>
         </p:txBody>
       </p:sp>
@@ -8183,24 +9426,24 @@
         </p:nvSpPr>
         <p:spPr>
           <a:xfrm>
-            <a:off x="2880360" y="5715000"/>
-            <a:ext cx="3246120" cy="420624"/>
-          </a:xfrm>
-          <a:prstGeom prst="rect">
-            <a:avLst/>
-          </a:prstGeom>
-          <a:noFill/>
-          <a:ln/>
-        </p:spPr>
-        <p:txBody>
-          <a:bodyPr wrap="square" lIns="0" tIns="0" rIns="0" bIns="0" rtlCol="0" anchor="ctr"/>
-          <a:lstStyle/>
-          <a:p>
-            <a:pPr indent="0" marL="0">
-              <a:buNone/>
-            </a:pPr>
-            <a:r>
-              <a:rPr lang="en-US" sz="1050" dirty="0">
+            <a:off x="2880360" y="5376672"/>
+            <a:ext cx="3246120" cy="365760"/>
+          </a:xfrm>
+          <a:prstGeom prst="rect">
+            <a:avLst/>
+          </a:prstGeom>
+          <a:noFill/>
+          <a:ln/>
+        </p:spPr>
+        <p:txBody>
+          <a:bodyPr wrap="square" lIns="0" tIns="0" rIns="0" bIns="0" rtlCol="0" anchor="ctr"/>
+          <a:lstStyle/>
+          <a:p>
+            <a:pPr indent="0" marL="0">
+              <a:buNone/>
+            </a:pPr>
+            <a:r>
+              <a:rPr lang="en-US" sz="1000" dirty="0">
                 <a:solidFill>
                   <a:srgbClr val="E8F0FA"/>
                 </a:solidFill>
@@ -8208,15 +9451,120 @@
                 <a:ea typeface="Calibri" pitchFamily="34" charset="-122"/>
                 <a:cs typeface="Calibri" pitchFamily="34" charset="-120"/>
               </a:rPr>
+              <a:t>Zip archive export</a:t>
+            </a:r>
+            <a:endParaRPr lang="en-US" sz="1000" dirty="0"/>
+          </a:p>
+        </p:txBody>
+      </p:sp>
+      <p:sp>
+        <p:nvSpPr>
+          <p:cNvPr id="23" name="Shape 21"/>
+          <p:cNvSpPr/>
+          <p:nvPr/>
+        </p:nvSpPr>
+        <p:spPr>
+          <a:xfrm>
+            <a:off x="548640" y="5861304"/>
+            <a:ext cx="5669280" cy="420624"/>
+          </a:xfrm>
+          <a:prstGeom prst="roundRect">
+            <a:avLst>
+              <a:gd name="adj" fmla="val 13043"/>
+            </a:avLst>
+          </a:prstGeom>
+          <a:solidFill>
+            <a:srgbClr val="111A2B"/>
+          </a:solidFill>
+          <a:ln w="12700">
+            <a:solidFill>
+              <a:srgbClr val="223454"/>
+            </a:solidFill>
+            <a:prstDash val="solid"/>
+          </a:ln>
+        </p:spPr>
+      </p:sp>
+      <p:sp>
+        <p:nvSpPr>
+          <p:cNvPr id="24" name="Text 22"/>
+          <p:cNvSpPr txBox="1"/>
+          <p:nvPr/>
+        </p:nvSpPr>
+        <p:spPr>
+          <a:xfrm>
+            <a:off x="731520" y="5888736"/>
+            <a:ext cx="2103120" cy="365760"/>
+          </a:xfrm>
+          <a:prstGeom prst="rect">
+            <a:avLst/>
+          </a:prstGeom>
+          <a:noFill/>
+          <a:ln/>
+        </p:spPr>
+        <p:txBody>
+          <a:bodyPr wrap="square" lIns="0" tIns="0" rIns="0" bIns="0" rtlCol="0" anchor="ctr"/>
+          <a:lstStyle/>
+          <a:p>
+            <a:pPr indent="0" marL="0">
+              <a:buNone/>
+            </a:pPr>
+            <a:r>
+              <a:rPr lang="en-US" sz="1050" b="1" dirty="0">
+                <a:solidFill>
+                  <a:srgbClr val="8FD8FF"/>
+                </a:solidFill>
+                <a:latin typeface="Courier New" pitchFamily="34" charset="0"/>
+                <a:ea typeface="Courier New" pitchFamily="34" charset="-122"/>
+                <a:cs typeface="Courier New" pitchFamily="34" charset="-120"/>
+              </a:rPr>
+              <a:t>jsPDF</a:t>
+            </a:r>
+            <a:endParaRPr lang="en-US" sz="1050" dirty="0"/>
+          </a:p>
+        </p:txBody>
+      </p:sp>
+      <p:sp>
+        <p:nvSpPr>
+          <p:cNvPr id="25" name="Text 23"/>
+          <p:cNvSpPr txBox="1"/>
+          <p:nvPr/>
+        </p:nvSpPr>
+        <p:spPr>
+          <a:xfrm>
+            <a:off x="2880360" y="5888736"/>
+            <a:ext cx="3246120" cy="365760"/>
+          </a:xfrm>
+          <a:prstGeom prst="rect">
+            <a:avLst/>
+          </a:prstGeom>
+          <a:noFill/>
+          <a:ln/>
+        </p:spPr>
+        <p:txBody>
+          <a:bodyPr wrap="square" lIns="0" tIns="0" rIns="0" bIns="0" rtlCol="0" anchor="ctr"/>
+          <a:lstStyle/>
+          <a:p>
+            <a:pPr indent="0" marL="0">
+              <a:buNone/>
+            </a:pPr>
+            <a:r>
+              <a:rPr lang="en-US" sz="1000" dirty="0">
+                <a:solidFill>
+                  <a:srgbClr val="E8F0FA"/>
+                </a:solidFill>
+                <a:latin typeface="Calibri" pitchFamily="34" charset="0"/>
+                <a:ea typeface="Calibri" pitchFamily="34" charset="-122"/>
+                <a:cs typeface="Calibri" pitchFamily="34" charset="-120"/>
+              </a:rPr>
               <a:t>Single-document PDF export</a:t>
             </a:r>
-            <a:endParaRPr lang="en-US" sz="1050" dirty="0"/>
-          </a:p>
-        </p:txBody>
-      </p:sp>
-      <p:sp>
-        <p:nvSpPr>
-          <p:cNvPr id="23" name="Shape 21"/>
+            <a:endParaRPr lang="en-US" sz="1000" dirty="0"/>
+          </a:p>
+        </p:txBody>
+      </p:sp>
+      <p:sp>
+        <p:nvSpPr>
+          <p:cNvPr id="26" name="Shape 24"/>
           <p:cNvSpPr/>
           <p:nvPr/>
         </p:nvSpPr>
@@ -8243,7 +9591,7 @@
       </p:sp>
       <p:sp>
         <p:nvSpPr>
-          <p:cNvPr id="24" name="Shape 22"/>
+          <p:cNvPr id="27" name="Shape 25"/>
           <p:cNvSpPr/>
           <p:nvPr/>
         </p:nvSpPr>
@@ -8263,7 +9611,7 @@
       </p:sp>
       <p:pic>
         <p:nvPicPr>
-          <p:cNvPr id="25" name="Image 0" descr="/home/claude/deck/icons/lock.png">    </p:cNvPr>
+          <p:cNvPr id="28" name="Image 0" descr="/home/claude/deck/icons/lock.png">    </p:cNvPr>
           <p:cNvPicPr>
             <a:picLocks noChangeAspect="1"/>
           </p:cNvPicPr>
@@ -8287,7 +9635,7 @@
       </p:pic>
       <p:sp>
         <p:nvSpPr>
-          <p:cNvPr id="26" name="Text 23"/>
+          <p:cNvPr id="29" name="Text 26"/>
           <p:cNvSpPr txBox="1"/>
           <p:nvPr/>
         </p:nvSpPr>
@@ -8326,7 +9674,7 @@
       </p:sp>
       <p:sp>
         <p:nvSpPr>
-          <p:cNvPr id="27" name="Text 24"/>
+          <p:cNvPr id="30" name="Text 27"/>
           <p:cNvSpPr txBox="1"/>
           <p:nvPr/>
         </p:nvSpPr>
@@ -8368,7 +9716,7 @@
       </p:sp>
       <p:sp>
         <p:nvSpPr>
-          <p:cNvPr id="28" name="Shape 25"/>
+          <p:cNvPr id="31" name="Shape 28"/>
           <p:cNvSpPr/>
           <p:nvPr/>
         </p:nvSpPr>
@@ -8391,7 +9739,7 @@
       </p:sp>
       <p:sp>
         <p:nvSpPr>
-          <p:cNvPr id="29" name="Text 26"/>
+          <p:cNvPr id="32" name="Text 29"/>
           <p:cNvSpPr txBox="1"/>
           <p:nvPr/>
         </p:nvSpPr>
@@ -8433,7 +9781,7 @@
       </p:sp>
       <p:sp>
         <p:nvSpPr>
-          <p:cNvPr id="30" name="Text 27"/>
+          <p:cNvPr id="33" name="Text 30"/>
           <p:cNvSpPr txBox="1"/>
           <p:nvPr/>
         </p:nvSpPr>
@@ -8464,7 +9812,7 @@
                 <a:ea typeface="Courier New" pitchFamily="34" charset="-122"/>
                 <a:cs typeface="Courier New" pitchFamily="34" charset="-120"/>
               </a:rPr>
-              <a:t>07</a:t>
+              <a:t>08</a:t>
             </a:r>
             <a:endParaRPr lang="en-US" sz="1000" dirty="0"/>
           </a:p>
@@ -8478,9 +9826,9 @@
 </p:sld>
 </file>
 
-<file path=ppt/slides/slide8.xml><?xml version="1.0" encoding="utf-8"?>
+<file path=ppt/slides/slide9.xml><?xml version="1.0" encoding="utf-8"?>
 <p:sld xmlns:a="http://schemas.openxmlformats.org/drawingml/2006/main" xmlns:r="http://schemas.openxmlformats.org/officeDocument/2006/relationships" xmlns:p="http://schemas.openxmlformats.org/presentationml/2006/main">
-  <p:cSld name="Slide 8">
+  <p:cSld name="Slide 9">
     <p:bg>
       <p:bgPr>
         <a:solidFill>
